--- a/presentations/20261116_PCSJ-IMPS2026_ポスター初案.pptx
+++ b/presentations/20261116_PCSJ-IMPS2026_ポスター初案.pptx
@@ -217,11 +217,11 @@
           <c:showLeaderLines val="1"/>
         </c:dLbls>
         <c:gapWidth val="45"/>
-        <c:axId val="-2068027336"/>
-        <c:axId val="-2113994440"/>
+        <c:axId val="2068027336"/>
+        <c:axId val="2113994440"/>
       </c:barChart>
       <c:catAx>
-        <c:axId val="-2068027336"/>
+        <c:axId val="2068027336"/>
         <c:scaling>
           <c:orientation val="minMax"/>
         </c:scaling>
@@ -246,7 +246,7 @@
             </a:pPr>
           </a:p>
         </c:txPr>
-        <c:crossAx val="-2113994440"/>
+        <c:crossAx val="2113994440"/>
         <c:crosses val="autoZero"/>
         <c:auto val="1"/>
         <c:lblAlgn val="ctr"/>
@@ -254,7 +254,7 @@
         <c:noMultiLvlLbl val="0"/>
       </c:catAx>
       <c:valAx>
-        <c:axId val="-2113994440"/>
+        <c:axId val="2113994440"/>
         <c:scaling>
           <c:max val="100.0"/>
           <c:min val="0.0"/>
@@ -291,7 +291,7 @@
             </a:pPr>
           </a:p>
         </c:txPr>
-        <c:crossAx val="-2068027336"/>
+        <c:crossAx val="2068027336"/>
         <c:crosses val="autoZero"/>
         <c:majorUnit val="25.0"/>
       </c:valAx>
@@ -304,7 +304,6 @@
     <a:p>
       <a:pPr>
         <a:defRPr sz="2400">
-          <a:latin typeface="游ゴシック"/>
           <a:latin typeface="游ゴシック"/>
           <a:ea typeface="游ゴシック"/>
         </a:defRPr>
@@ -519,11 +518,11 @@
         </c:dLbls>
         <c:gapWidth val="55"/>
         <c:overlap val="-5"/>
-        <c:axId val="-2068027336"/>
-        <c:axId val="-2113994440"/>
+        <c:axId val="2068027336"/>
+        <c:axId val="2113994440"/>
       </c:barChart>
       <c:catAx>
-        <c:axId val="-2068027336"/>
+        <c:axId val="2068027336"/>
         <c:scaling>
           <c:orientation val="minMax"/>
         </c:scaling>
@@ -548,7 +547,7 @@
             </a:pPr>
           </a:p>
         </c:txPr>
-        <c:crossAx val="-2113994440"/>
+        <c:crossAx val="2113994440"/>
         <c:crosses val="autoZero"/>
         <c:auto val="1"/>
         <c:lblAlgn val="ctr"/>
@@ -556,7 +555,7 @@
         <c:noMultiLvlLbl val="0"/>
       </c:catAx>
       <c:valAx>
-        <c:axId val="-2113994440"/>
+        <c:axId val="2113994440"/>
         <c:scaling>
           <c:max val="0.45"/>
           <c:min val="0.0"/>
@@ -593,7 +592,7 @@
             </a:pPr>
           </a:p>
         </c:txPr>
-        <c:crossAx val="-2068027336"/>
+        <c:crossAx val="2068027336"/>
         <c:crosses val="autoZero"/>
         <c:majorUnit val="0.1"/>
       </c:valAx>
@@ -621,7 +620,6 @@
     <a:p>
       <a:pPr>
         <a:defRPr sz="2400">
-          <a:latin typeface="游ゴシック"/>
           <a:latin typeface="游ゴシック"/>
           <a:ea typeface="游ゴシック"/>
         </a:defRPr>
@@ -922,11 +920,11 @@
         </c:ser>
         <c:gapWidth val="40"/>
         <c:overlap val="-5"/>
-        <c:axId val="-2068027336"/>
-        <c:axId val="-2113994440"/>
+        <c:axId val="2068027336"/>
+        <c:axId val="2113994440"/>
       </c:barChart>
       <c:catAx>
-        <c:axId val="-2068027336"/>
+        <c:axId val="2068027336"/>
         <c:scaling>
           <c:orientation val="minMax"/>
         </c:scaling>
@@ -951,7 +949,7 @@
             </a:pPr>
           </a:p>
         </c:txPr>
-        <c:crossAx val="-2113994440"/>
+        <c:crossAx val="2113994440"/>
         <c:crosses val="autoZero"/>
         <c:auto val="1"/>
         <c:lblAlgn val="ctr"/>
@@ -959,7 +957,7 @@
         <c:noMultiLvlLbl val="0"/>
       </c:catAx>
       <c:valAx>
-        <c:axId val="-2113994440"/>
+        <c:axId val="2113994440"/>
         <c:scaling>
           <c:max val="50.0"/>
           <c:min val="0.0"/>
@@ -1012,7 +1010,7 @@
             </a:pPr>
           </a:p>
         </c:txPr>
-        <c:crossAx val="-2068027336"/>
+        <c:crossAx val="2068027336"/>
         <c:crosses val="autoZero"/>
         <c:majorUnit val="10.0"/>
       </c:valAx>
@@ -1040,7 +1038,6 @@
     <a:p>
       <a:pPr>
         <a:defRPr sz="2000">
-          <a:latin typeface="游ゴシック"/>
           <a:latin typeface="游ゴシック"/>
           <a:ea typeface="游ゴシック"/>
         </a:defRPr>

--- a/presentations/20261116_PCSJ-IMPS2026_ポスター初案.pptx
+++ b/presentations/20261116_PCSJ-IMPS2026_ポスター初案.pptx
@@ -7960,7 +7960,7 @@
                 <a:ea typeface="游ゴシック"/>
                 <a:cs typeface="游ゴシック"/>
               </a:rPr>
-              <a:t>合成画像に，測定と同じ加工のコードを施した例</a:t>
+              <a:t>評価データの問「Who is wearing the dress?」に，測定で施した加工（画像：GQA）</a:t>
             </a:r>
           </a:p>
         </p:txBody>

--- a/presentations/20261116_PCSJ-IMPS2026_ポスター初案.pptx
+++ b/presentations/20261116_PCSJ-IMPS2026_ポスター初案.pptx
@@ -11,10 +11,10 @@
   <p:notesSz cx="6858000" cy="9144000"/>
   <p:defaultTextStyle>
     <a:defPPr>
-      <a:defRPr lang="en-US"/>
+      <a:defRPr lang="ja-JP"/>
     </a:defPPr>
     <a:lvl1pPr marL="0" algn="l" defTabSz="457200" rtl="0" eaLnBrk="1" latinLnBrk="0" hangingPunct="1">
-      <a:defRPr sz="1800" kern="1200">
+      <a:defRPr sz="1800" kern="1200" lang="ja-JP">
         <a:solidFill>
           <a:schemeClr val="tx1"/>
         </a:solidFill>
@@ -24,7 +24,7 @@
       </a:defRPr>
     </a:lvl1pPr>
     <a:lvl2pPr marL="457200" algn="l" defTabSz="457200" rtl="0" eaLnBrk="1" latinLnBrk="0" hangingPunct="1">
-      <a:defRPr sz="1800" kern="1200">
+      <a:defRPr sz="1800" kern="1200" lang="ja-JP">
         <a:solidFill>
           <a:schemeClr val="tx1"/>
         </a:solidFill>
@@ -34,7 +34,7 @@
       </a:defRPr>
     </a:lvl2pPr>
     <a:lvl3pPr marL="914400" algn="l" defTabSz="457200" rtl="0" eaLnBrk="1" latinLnBrk="0" hangingPunct="1">
-      <a:defRPr sz="1800" kern="1200">
+      <a:defRPr sz="1800" kern="1200" lang="ja-JP">
         <a:solidFill>
           <a:schemeClr val="tx1"/>
         </a:solidFill>
@@ -44,7 +44,7 @@
       </a:defRPr>
     </a:lvl3pPr>
     <a:lvl4pPr marL="1371600" algn="l" defTabSz="457200" rtl="0" eaLnBrk="1" latinLnBrk="0" hangingPunct="1">
-      <a:defRPr sz="1800" kern="1200">
+      <a:defRPr sz="1800" kern="1200" lang="ja-JP">
         <a:solidFill>
           <a:schemeClr val="tx1"/>
         </a:solidFill>
@@ -54,7 +54,7 @@
       </a:defRPr>
     </a:lvl4pPr>
     <a:lvl5pPr marL="1828800" algn="l" defTabSz="457200" rtl="0" eaLnBrk="1" latinLnBrk="0" hangingPunct="1">
-      <a:defRPr sz="1800" kern="1200">
+      <a:defRPr sz="1800" kern="1200" lang="ja-JP">
         <a:solidFill>
           <a:schemeClr val="tx1"/>
         </a:solidFill>
@@ -64,7 +64,7 @@
       </a:defRPr>
     </a:lvl5pPr>
     <a:lvl6pPr marL="2286000" algn="l" defTabSz="457200" rtl="0" eaLnBrk="1" latinLnBrk="0" hangingPunct="1">
-      <a:defRPr sz="1800" kern="1200">
+      <a:defRPr sz="1800" kern="1200" lang="ja-JP">
         <a:solidFill>
           <a:schemeClr val="tx1"/>
         </a:solidFill>
@@ -74,7 +74,7 @@
       </a:defRPr>
     </a:lvl6pPr>
     <a:lvl7pPr marL="2743200" algn="l" defTabSz="457200" rtl="0" eaLnBrk="1" latinLnBrk="0" hangingPunct="1">
-      <a:defRPr sz="1800" kern="1200">
+      <a:defRPr sz="1800" kern="1200" lang="ja-JP">
         <a:solidFill>
           <a:schemeClr val="tx1"/>
         </a:solidFill>
@@ -84,7 +84,7 @@
       </a:defRPr>
     </a:lvl7pPr>
     <a:lvl8pPr marL="3200400" algn="l" defTabSz="457200" rtl="0" eaLnBrk="1" latinLnBrk="0" hangingPunct="1">
-      <a:defRPr sz="1800" kern="1200">
+      <a:defRPr sz="1800" kern="1200" lang="ja-JP">
         <a:solidFill>
           <a:schemeClr val="tx1"/>
         </a:solidFill>
@@ -94,7 +94,7 @@
       </a:defRPr>
     </a:lvl8pPr>
     <a:lvl9pPr marL="3657600" algn="l" defTabSz="457200" rtl="0" eaLnBrk="1" latinLnBrk="0" hangingPunct="1">
-      <a:defRPr sz="1800" kern="1200">
+      <a:defRPr sz="1800" kern="1200" lang="ja-JP">
         <a:solidFill>
           <a:schemeClr val="tx1"/>
         </a:solidFill>
@@ -201,7 +201,7 @@
             <a:lstStyle/>
             <a:p>
               <a:pPr>
-                <a:defRPr sz="2400">
+                <a:defRPr sz="2400" lang="ja-JP">
                   <a:latin typeface="游ゴシック"/>
                 </a:defRPr>
               </a:pPr>
@@ -242,7 +242,7 @@
           <a:lstStyle/>
           <a:p>
             <a:pPr>
-              <a:defRPr sz="2400"/>
+              <a:defRPr sz="2400" lang="ja-JP"/>
             </a:pPr>
           </a:p>
         </c:txPr>
@@ -283,7 +283,7 @@
           <a:lstStyle/>
           <a:p>
             <a:pPr>
-              <a:defRPr sz="2400">
+              <a:defRPr sz="2400" lang="ja-JP">
                 <a:solidFill>
                   <a:srgbClr val="595959"/>
                 </a:solidFill>
@@ -303,12 +303,12 @@
     <a:lstStyle/>
     <a:p>
       <a:pPr>
-        <a:defRPr sz="2400">
+        <a:defRPr sz="2400" lang="ja-JP">
           <a:latin typeface="游ゴシック"/>
           <a:ea typeface="游ゴシック"/>
         </a:defRPr>
       </a:pPr>
-      <a:endParaRPr lang="en-US"/>
+      <a:endParaRPr lang="ja-JP"/>
     </a:p>
   </c:txPr>
   <c:externalData r:id="rId1">
@@ -501,7 +501,7 @@
             <a:lstStyle/>
             <a:p>
               <a:pPr>
-                <a:defRPr sz="2300">
+                <a:defRPr sz="2300" lang="ja-JP">
                   <a:latin typeface="游ゴシック"/>
                 </a:defRPr>
               </a:pPr>
@@ -543,7 +543,7 @@
           <a:lstStyle/>
           <a:p>
             <a:pPr>
-              <a:defRPr sz="2400"/>
+              <a:defRPr sz="2400" lang="ja-JP"/>
             </a:pPr>
           </a:p>
         </c:txPr>
@@ -584,7 +584,7 @@
           <a:lstStyle/>
           <a:p>
             <a:pPr>
-              <a:defRPr sz="2400">
+              <a:defRPr sz="2400" lang="ja-JP">
                 <a:solidFill>
                   <a:srgbClr val="595959"/>
                 </a:solidFill>
@@ -605,7 +605,7 @@
         <a:lstStyle/>
         <a:p>
           <a:pPr>
-            <a:defRPr sz="2400">
+            <a:defRPr sz="2400" lang="ja-JP">
               <a:latin typeface="游ゴシック"/>
             </a:defRPr>
           </a:pPr>
@@ -619,12 +619,12 @@
     <a:lstStyle/>
     <a:p>
       <a:pPr>
-        <a:defRPr sz="2400">
+        <a:defRPr sz="2400" lang="ja-JP">
           <a:latin typeface="游ゴシック"/>
           <a:ea typeface="游ゴシック"/>
         </a:defRPr>
       </a:pPr>
-      <a:endParaRPr lang="en-US"/>
+      <a:endParaRPr lang="ja-JP"/>
     </a:p>
   </c:txPr>
   <c:externalData r:id="rId1">
@@ -945,7 +945,7 @@
           <a:lstStyle/>
           <a:p>
             <a:pPr>
-              <a:defRPr sz="2000"/>
+              <a:defRPr sz="2000" lang="ja-JP"/>
             </a:pPr>
           </a:p>
         </c:txPr>
@@ -980,7 +980,7 @@
               <a:lstStyle/>
               <a:p>
                 <a:r>
-                  <a:rPr sz="2000"/>
+                  <a:rPr sz="2000" lang="ja-JP"/>
                   <a:t>第16層の比（%）</a:t>
                 </a:r>
               </a:p>
@@ -1002,7 +1002,7 @@
           <a:lstStyle/>
           <a:p>
             <a:pPr>
-              <a:defRPr sz="2000">
+              <a:defRPr sz="2000" lang="ja-JP">
                 <a:solidFill>
                   <a:srgbClr val="595959"/>
                 </a:solidFill>
@@ -1023,7 +1023,7 @@
         <a:lstStyle/>
         <a:p>
           <a:pPr>
-            <a:defRPr sz="2000">
+            <a:defRPr sz="2000" lang="ja-JP">
               <a:latin typeface="游ゴシック"/>
             </a:defRPr>
           </a:pPr>
@@ -1037,12 +1037,12 @@
     <a:lstStyle/>
     <a:p>
       <a:pPr>
-        <a:defRPr sz="2000">
+        <a:defRPr sz="2000" lang="ja-JP">
           <a:latin typeface="游ゴシック"/>
           <a:ea typeface="游ゴシック"/>
         </a:defRPr>
       </a:pPr>
-      <a:endParaRPr lang="en-US"/>
+      <a:endParaRPr lang="ja-JP"/>
     </a:p>
   </c:txPr>
   <c:externalData r:id="rId1">
@@ -1089,10 +1089,10 @@
           <a:lstStyle/>
           <a:p>
             <a:r>
-              <a:rPr lang="en-US" smtClean="0"/>
+              <a:rPr lang="ja-JP" smtClean="0"/>
               <a:t>Click to edit Master title style</a:t>
             </a:r>
-            <a:endParaRPr lang="en-US"/>
+            <a:endParaRPr lang="ja-JP"/>
           </a:p>
         </p:txBody>
       </p:sp>
@@ -1117,7 +1117,7 @@
           <a:lstStyle>
             <a:lvl1pPr marL="0" indent="0" algn="ctr">
               <a:buNone/>
-              <a:defRPr>
+              <a:defRPr lang="ja-JP">
                 <a:solidFill>
                   <a:schemeClr val="tx1">
                     <a:tint val="75000"/>
@@ -1127,7 +1127,7 @@
             </a:lvl1pPr>
             <a:lvl2pPr marL="457200" indent="0" algn="ctr">
               <a:buNone/>
-              <a:defRPr>
+              <a:defRPr lang="ja-JP">
                 <a:solidFill>
                   <a:schemeClr val="tx1">
                     <a:tint val="75000"/>
@@ -1137,7 +1137,7 @@
             </a:lvl2pPr>
             <a:lvl3pPr marL="914400" indent="0" algn="ctr">
               <a:buNone/>
-              <a:defRPr>
+              <a:defRPr lang="ja-JP">
                 <a:solidFill>
                   <a:schemeClr val="tx1">
                     <a:tint val="75000"/>
@@ -1147,7 +1147,7 @@
             </a:lvl3pPr>
             <a:lvl4pPr marL="1371600" indent="0" algn="ctr">
               <a:buNone/>
-              <a:defRPr>
+              <a:defRPr lang="ja-JP">
                 <a:solidFill>
                   <a:schemeClr val="tx1">
                     <a:tint val="75000"/>
@@ -1157,7 +1157,7 @@
             </a:lvl4pPr>
             <a:lvl5pPr marL="1828800" indent="0" algn="ctr">
               <a:buNone/>
-              <a:defRPr>
+              <a:defRPr lang="ja-JP">
                 <a:solidFill>
                   <a:schemeClr val="tx1">
                     <a:tint val="75000"/>
@@ -1167,7 +1167,7 @@
             </a:lvl5pPr>
             <a:lvl6pPr marL="2286000" indent="0" algn="ctr">
               <a:buNone/>
-              <a:defRPr>
+              <a:defRPr lang="ja-JP">
                 <a:solidFill>
                   <a:schemeClr val="tx1">
                     <a:tint val="75000"/>
@@ -1177,7 +1177,7 @@
             </a:lvl6pPr>
             <a:lvl7pPr marL="2743200" indent="0" algn="ctr">
               <a:buNone/>
-              <a:defRPr>
+              <a:defRPr lang="ja-JP">
                 <a:solidFill>
                   <a:schemeClr val="tx1">
                     <a:tint val="75000"/>
@@ -1187,7 +1187,7 @@
             </a:lvl7pPr>
             <a:lvl8pPr marL="3200400" indent="0" algn="ctr">
               <a:buNone/>
-              <a:defRPr>
+              <a:defRPr lang="ja-JP">
                 <a:solidFill>
                   <a:schemeClr val="tx1">
                     <a:tint val="75000"/>
@@ -1197,7 +1197,7 @@
             </a:lvl8pPr>
             <a:lvl9pPr marL="3657600" indent="0" algn="ctr">
               <a:buNone/>
-              <a:defRPr>
+              <a:defRPr lang="ja-JP">
                 <a:solidFill>
                   <a:schemeClr val="tx1">
                     <a:tint val="75000"/>
@@ -1208,10 +1208,10 @@
           </a:lstStyle>
           <a:p>
             <a:r>
-              <a:rPr lang="en-US" smtClean="0"/>
+              <a:rPr lang="ja-JP" smtClean="0"/>
               <a:t>Click to edit Master subtitle style</a:t>
             </a:r>
-            <a:endParaRPr lang="en-US"/>
+            <a:endParaRPr lang="ja-JP"/>
           </a:p>
         </p:txBody>
       </p:sp>
@@ -1231,10 +1231,10 @@
           <a:lstStyle/>
           <a:p>
             <a:fld id="{5BCAD085-E8A6-8845-BD4E-CB4CCA059FC4}" type="datetimeFigureOut">
-              <a:rPr lang="en-US" smtClean="0"/>
+              <a:rPr lang="ja-JP" smtClean="0"/>
               <a:t>1/27/13</a:t>
             </a:fld>
-            <a:endParaRPr lang="en-US"/>
+            <a:endParaRPr lang="ja-JP"/>
           </a:p>
         </p:txBody>
       </p:sp>
@@ -1253,7 +1253,7 @@
           <a:bodyPr/>
           <a:lstStyle/>
           <a:p>
-            <a:endParaRPr lang="en-US"/>
+            <a:endParaRPr lang="ja-JP"/>
           </a:p>
         </p:txBody>
       </p:sp>
@@ -1273,10 +1273,10 @@
           <a:lstStyle/>
           <a:p>
             <a:fld id="{C1FF6DA9-008F-8B48-92A6-B652298478BF}" type="slidenum">
-              <a:rPr lang="en-US" smtClean="0"/>
+              <a:rPr lang="ja-JP" smtClean="0"/>
               <a:t>‹#›</a:t>
             </a:fld>
-            <a:endParaRPr lang="en-US"/>
+            <a:endParaRPr lang="ja-JP"/>
           </a:p>
         </p:txBody>
       </p:sp>
@@ -1326,10 +1326,10 @@
           <a:lstStyle/>
           <a:p>
             <a:r>
-              <a:rPr lang="en-US" smtClean="0"/>
+              <a:rPr lang="ja-JP" smtClean="0"/>
               <a:t>Click to edit Master title style</a:t>
             </a:r>
-            <a:endParaRPr lang="en-US"/>
+            <a:endParaRPr lang="ja-JP"/>
           </a:p>
         </p:txBody>
       </p:sp>
@@ -1350,38 +1350,38 @@
           <a:p>
             <a:pPr lvl="0"/>
             <a:r>
-              <a:rPr lang="en-US" smtClean="0"/>
+              <a:rPr lang="ja-JP" smtClean="0"/>
               <a:t>Click to edit Master text styles</a:t>
             </a:r>
           </a:p>
           <a:p>
             <a:pPr lvl="1"/>
             <a:r>
-              <a:rPr lang="en-US" smtClean="0"/>
+              <a:rPr lang="ja-JP" smtClean="0"/>
               <a:t>Second level</a:t>
             </a:r>
           </a:p>
           <a:p>
             <a:pPr lvl="2"/>
             <a:r>
-              <a:rPr lang="en-US" smtClean="0"/>
+              <a:rPr lang="ja-JP" smtClean="0"/>
               <a:t>Third level</a:t>
             </a:r>
           </a:p>
           <a:p>
             <a:pPr lvl="3"/>
             <a:r>
-              <a:rPr lang="en-US" smtClean="0"/>
+              <a:rPr lang="ja-JP" smtClean="0"/>
               <a:t>Fourth level</a:t>
             </a:r>
           </a:p>
           <a:p>
             <a:pPr lvl="4"/>
             <a:r>
-              <a:rPr lang="en-US" smtClean="0"/>
+              <a:rPr lang="ja-JP" smtClean="0"/>
               <a:t>Fifth level</a:t>
             </a:r>
-            <a:endParaRPr lang="en-US"/>
+            <a:endParaRPr lang="ja-JP"/>
           </a:p>
         </p:txBody>
       </p:sp>
@@ -1401,10 +1401,10 @@
           <a:lstStyle/>
           <a:p>
             <a:fld id="{5BCAD085-E8A6-8845-BD4E-CB4CCA059FC4}" type="datetimeFigureOut">
-              <a:rPr lang="en-US" smtClean="0"/>
+              <a:rPr lang="ja-JP" smtClean="0"/>
               <a:t>1/27/13</a:t>
             </a:fld>
-            <a:endParaRPr lang="en-US"/>
+            <a:endParaRPr lang="ja-JP"/>
           </a:p>
         </p:txBody>
       </p:sp>
@@ -1423,7 +1423,7 @@
           <a:bodyPr/>
           <a:lstStyle/>
           <a:p>
-            <a:endParaRPr lang="en-US"/>
+            <a:endParaRPr lang="ja-JP"/>
           </a:p>
         </p:txBody>
       </p:sp>
@@ -1443,10 +1443,10 @@
           <a:lstStyle/>
           <a:p>
             <a:fld id="{C1FF6DA9-008F-8B48-92A6-B652298478BF}" type="slidenum">
-              <a:rPr lang="en-US" smtClean="0"/>
+              <a:rPr lang="ja-JP" smtClean="0"/>
               <a:t>‹#›</a:t>
             </a:fld>
-            <a:endParaRPr lang="en-US"/>
+            <a:endParaRPr lang="ja-JP"/>
           </a:p>
         </p:txBody>
       </p:sp>
@@ -1501,10 +1501,10 @@
           <a:lstStyle/>
           <a:p>
             <a:r>
-              <a:rPr lang="en-US" smtClean="0"/>
+              <a:rPr lang="ja-JP" smtClean="0"/>
               <a:t>Click to edit Master title style</a:t>
             </a:r>
-            <a:endParaRPr lang="en-US"/>
+            <a:endParaRPr lang="ja-JP"/>
           </a:p>
         </p:txBody>
       </p:sp>
@@ -1530,38 +1530,38 @@
           <a:p>
             <a:pPr lvl="0"/>
             <a:r>
-              <a:rPr lang="en-US" smtClean="0"/>
+              <a:rPr lang="ja-JP" smtClean="0"/>
               <a:t>Click to edit Master text styles</a:t>
             </a:r>
           </a:p>
           <a:p>
             <a:pPr lvl="1"/>
             <a:r>
-              <a:rPr lang="en-US" smtClean="0"/>
+              <a:rPr lang="ja-JP" smtClean="0"/>
               <a:t>Second level</a:t>
             </a:r>
           </a:p>
           <a:p>
             <a:pPr lvl="2"/>
             <a:r>
-              <a:rPr lang="en-US" smtClean="0"/>
+              <a:rPr lang="ja-JP" smtClean="0"/>
               <a:t>Third level</a:t>
             </a:r>
           </a:p>
           <a:p>
             <a:pPr lvl="3"/>
             <a:r>
-              <a:rPr lang="en-US" smtClean="0"/>
+              <a:rPr lang="ja-JP" smtClean="0"/>
               <a:t>Fourth level</a:t>
             </a:r>
           </a:p>
           <a:p>
             <a:pPr lvl="4"/>
             <a:r>
-              <a:rPr lang="en-US" smtClean="0"/>
+              <a:rPr lang="ja-JP" smtClean="0"/>
               <a:t>Fifth level</a:t>
             </a:r>
-            <a:endParaRPr lang="en-US"/>
+            <a:endParaRPr lang="ja-JP"/>
           </a:p>
         </p:txBody>
       </p:sp>
@@ -1581,10 +1581,10 @@
           <a:lstStyle/>
           <a:p>
             <a:fld id="{5BCAD085-E8A6-8845-BD4E-CB4CCA059FC4}" type="datetimeFigureOut">
-              <a:rPr lang="en-US" smtClean="0"/>
+              <a:rPr lang="ja-JP" smtClean="0"/>
               <a:t>1/27/13</a:t>
             </a:fld>
-            <a:endParaRPr lang="en-US"/>
+            <a:endParaRPr lang="ja-JP"/>
           </a:p>
         </p:txBody>
       </p:sp>
@@ -1603,7 +1603,7 @@
           <a:bodyPr/>
           <a:lstStyle/>
           <a:p>
-            <a:endParaRPr lang="en-US"/>
+            <a:endParaRPr lang="ja-JP"/>
           </a:p>
         </p:txBody>
       </p:sp>
@@ -1623,10 +1623,10 @@
           <a:lstStyle/>
           <a:p>
             <a:fld id="{C1FF6DA9-008F-8B48-92A6-B652298478BF}" type="slidenum">
-              <a:rPr lang="en-US" smtClean="0"/>
+              <a:rPr lang="ja-JP" smtClean="0"/>
               <a:t>‹#›</a:t>
             </a:fld>
-            <a:endParaRPr lang="en-US"/>
+            <a:endParaRPr lang="ja-JP"/>
           </a:p>
         </p:txBody>
       </p:sp>
@@ -1676,10 +1676,10 @@
           <a:lstStyle/>
           <a:p>
             <a:r>
-              <a:rPr lang="en-US" smtClean="0"/>
+              <a:rPr lang="ja-JP" smtClean="0"/>
               <a:t>Click to edit Master title style</a:t>
             </a:r>
-            <a:endParaRPr lang="en-US"/>
+            <a:endParaRPr lang="ja-JP"/>
           </a:p>
         </p:txBody>
       </p:sp>
@@ -1700,38 +1700,38 @@
           <a:p>
             <a:pPr lvl="0"/>
             <a:r>
-              <a:rPr lang="en-US" smtClean="0"/>
+              <a:rPr lang="ja-JP" smtClean="0"/>
               <a:t>Click to edit Master text styles</a:t>
             </a:r>
           </a:p>
           <a:p>
             <a:pPr lvl="1"/>
             <a:r>
-              <a:rPr lang="en-US" smtClean="0"/>
+              <a:rPr lang="ja-JP" smtClean="0"/>
               <a:t>Second level</a:t>
             </a:r>
           </a:p>
           <a:p>
             <a:pPr lvl="2"/>
             <a:r>
-              <a:rPr lang="en-US" smtClean="0"/>
+              <a:rPr lang="ja-JP" smtClean="0"/>
               <a:t>Third level</a:t>
             </a:r>
           </a:p>
           <a:p>
             <a:pPr lvl="3"/>
             <a:r>
-              <a:rPr lang="en-US" smtClean="0"/>
+              <a:rPr lang="ja-JP" smtClean="0"/>
               <a:t>Fourth level</a:t>
             </a:r>
           </a:p>
           <a:p>
             <a:pPr lvl="4"/>
             <a:r>
-              <a:rPr lang="en-US" smtClean="0"/>
+              <a:rPr lang="ja-JP" smtClean="0"/>
               <a:t>Fifth level</a:t>
             </a:r>
-            <a:endParaRPr lang="en-US"/>
+            <a:endParaRPr lang="ja-JP"/>
           </a:p>
         </p:txBody>
       </p:sp>
@@ -1751,10 +1751,10 @@
           <a:lstStyle/>
           <a:p>
             <a:fld id="{5BCAD085-E8A6-8845-BD4E-CB4CCA059FC4}" type="datetimeFigureOut">
-              <a:rPr lang="en-US" smtClean="0"/>
+              <a:rPr lang="ja-JP" smtClean="0"/>
               <a:t>1/27/13</a:t>
             </a:fld>
-            <a:endParaRPr lang="en-US"/>
+            <a:endParaRPr lang="ja-JP"/>
           </a:p>
         </p:txBody>
       </p:sp>
@@ -1773,7 +1773,7 @@
           <a:bodyPr/>
           <a:lstStyle/>
           <a:p>
-            <a:endParaRPr lang="en-US"/>
+            <a:endParaRPr lang="ja-JP"/>
           </a:p>
         </p:txBody>
       </p:sp>
@@ -1793,10 +1793,10 @@
           <a:lstStyle/>
           <a:p>
             <a:fld id="{C1FF6DA9-008F-8B48-92A6-B652298478BF}" type="slidenum">
-              <a:rPr lang="en-US" smtClean="0"/>
+              <a:rPr lang="ja-JP" smtClean="0"/>
               <a:t>‹#›</a:t>
             </a:fld>
-            <a:endParaRPr lang="en-US"/>
+            <a:endParaRPr lang="ja-JP"/>
           </a:p>
         </p:txBody>
       </p:sp>
@@ -1850,15 +1850,15 @@
           <a:bodyPr anchor="t"/>
           <a:lstStyle>
             <a:lvl1pPr algn="l">
-              <a:defRPr sz="4000" b="1" cap="all"/>
+              <a:defRPr sz="4000" b="1" cap="all" lang="ja-JP"/>
             </a:lvl1pPr>
           </a:lstStyle>
           <a:p>
             <a:r>
-              <a:rPr lang="en-US" smtClean="0"/>
+              <a:rPr lang="ja-JP" smtClean="0"/>
               <a:t>Click to edit Master title style</a:t>
             </a:r>
-            <a:endParaRPr lang="en-US"/>
+            <a:endParaRPr lang="ja-JP"/>
           </a:p>
         </p:txBody>
       </p:sp>
@@ -1883,7 +1883,7 @@
           <a:lstStyle>
             <a:lvl1pPr marL="0" indent="0">
               <a:buNone/>
-              <a:defRPr sz="2000">
+              <a:defRPr sz="2000" lang="ja-JP">
                 <a:solidFill>
                   <a:schemeClr val="tx1">
                     <a:tint val="75000"/>
@@ -1893,7 +1893,7 @@
             </a:lvl1pPr>
             <a:lvl2pPr marL="457200" indent="0">
               <a:buNone/>
-              <a:defRPr sz="1800">
+              <a:defRPr sz="1800" lang="ja-JP">
                 <a:solidFill>
                   <a:schemeClr val="tx1">
                     <a:tint val="75000"/>
@@ -1903,7 +1903,7 @@
             </a:lvl2pPr>
             <a:lvl3pPr marL="914400" indent="0">
               <a:buNone/>
-              <a:defRPr sz="1600">
+              <a:defRPr sz="1600" lang="ja-JP">
                 <a:solidFill>
                   <a:schemeClr val="tx1">
                     <a:tint val="75000"/>
@@ -1913,7 +1913,7 @@
             </a:lvl3pPr>
             <a:lvl4pPr marL="1371600" indent="0">
               <a:buNone/>
-              <a:defRPr sz="1400">
+              <a:defRPr sz="1400" lang="ja-JP">
                 <a:solidFill>
                   <a:schemeClr val="tx1">
                     <a:tint val="75000"/>
@@ -1923,7 +1923,7 @@
             </a:lvl4pPr>
             <a:lvl5pPr marL="1828800" indent="0">
               <a:buNone/>
-              <a:defRPr sz="1400">
+              <a:defRPr sz="1400" lang="ja-JP">
                 <a:solidFill>
                   <a:schemeClr val="tx1">
                     <a:tint val="75000"/>
@@ -1933,7 +1933,7 @@
             </a:lvl5pPr>
             <a:lvl6pPr marL="2286000" indent="0">
               <a:buNone/>
-              <a:defRPr sz="1400">
+              <a:defRPr sz="1400" lang="ja-JP">
                 <a:solidFill>
                   <a:schemeClr val="tx1">
                     <a:tint val="75000"/>
@@ -1943,7 +1943,7 @@
             </a:lvl6pPr>
             <a:lvl7pPr marL="2743200" indent="0">
               <a:buNone/>
-              <a:defRPr sz="1400">
+              <a:defRPr sz="1400" lang="ja-JP">
                 <a:solidFill>
                   <a:schemeClr val="tx1">
                     <a:tint val="75000"/>
@@ -1953,7 +1953,7 @@
             </a:lvl7pPr>
             <a:lvl8pPr marL="3200400" indent="0">
               <a:buNone/>
-              <a:defRPr sz="1400">
+              <a:defRPr sz="1400" lang="ja-JP">
                 <a:solidFill>
                   <a:schemeClr val="tx1">
                     <a:tint val="75000"/>
@@ -1963,7 +1963,7 @@
             </a:lvl8pPr>
             <a:lvl9pPr marL="3657600" indent="0">
               <a:buNone/>
-              <a:defRPr sz="1400">
+              <a:defRPr sz="1400" lang="ja-JP">
                 <a:solidFill>
                   <a:schemeClr val="tx1">
                     <a:tint val="75000"/>
@@ -1975,7 +1975,7 @@
           <a:p>
             <a:pPr lvl="0"/>
             <a:r>
-              <a:rPr lang="en-US" smtClean="0"/>
+              <a:rPr lang="ja-JP" smtClean="0"/>
               <a:t>Click to edit Master text styles</a:t>
             </a:r>
           </a:p>
@@ -1997,10 +1997,10 @@
           <a:lstStyle/>
           <a:p>
             <a:fld id="{5BCAD085-E8A6-8845-BD4E-CB4CCA059FC4}" type="datetimeFigureOut">
-              <a:rPr lang="en-US" smtClean="0"/>
+              <a:rPr lang="ja-JP" smtClean="0"/>
               <a:t>1/27/13</a:t>
             </a:fld>
-            <a:endParaRPr lang="en-US"/>
+            <a:endParaRPr lang="ja-JP"/>
           </a:p>
         </p:txBody>
       </p:sp>
@@ -2019,7 +2019,7 @@
           <a:bodyPr/>
           <a:lstStyle/>
           <a:p>
-            <a:endParaRPr lang="en-US"/>
+            <a:endParaRPr lang="ja-JP"/>
           </a:p>
         </p:txBody>
       </p:sp>
@@ -2039,10 +2039,10 @@
           <a:lstStyle/>
           <a:p>
             <a:fld id="{C1FF6DA9-008F-8B48-92A6-B652298478BF}" type="slidenum">
-              <a:rPr lang="en-US" smtClean="0"/>
+              <a:rPr lang="ja-JP" smtClean="0"/>
               <a:t>‹#›</a:t>
             </a:fld>
-            <a:endParaRPr lang="en-US"/>
+            <a:endParaRPr lang="ja-JP"/>
           </a:p>
         </p:txBody>
       </p:sp>
@@ -2092,10 +2092,10 @@
           <a:lstStyle/>
           <a:p>
             <a:r>
-              <a:rPr lang="en-US" smtClean="0"/>
+              <a:rPr lang="ja-JP" smtClean="0"/>
               <a:t>Click to edit Master title style</a:t>
             </a:r>
-            <a:endParaRPr lang="en-US"/>
+            <a:endParaRPr lang="ja-JP"/>
           </a:p>
         </p:txBody>
       </p:sp>
@@ -2119,68 +2119,68 @@
           <a:bodyPr/>
           <a:lstStyle>
             <a:lvl1pPr>
-              <a:defRPr sz="2800"/>
+              <a:defRPr sz="2800" lang="ja-JP"/>
             </a:lvl1pPr>
             <a:lvl2pPr>
-              <a:defRPr sz="2400"/>
+              <a:defRPr sz="2400" lang="ja-JP"/>
             </a:lvl2pPr>
             <a:lvl3pPr>
-              <a:defRPr sz="2000"/>
+              <a:defRPr sz="2000" lang="ja-JP"/>
             </a:lvl3pPr>
             <a:lvl4pPr>
-              <a:defRPr sz="1800"/>
+              <a:defRPr sz="1800" lang="ja-JP"/>
             </a:lvl4pPr>
             <a:lvl5pPr>
-              <a:defRPr sz="1800"/>
+              <a:defRPr sz="1800" lang="ja-JP"/>
             </a:lvl5pPr>
             <a:lvl6pPr>
-              <a:defRPr sz="1800"/>
+              <a:defRPr sz="1800" lang="ja-JP"/>
             </a:lvl6pPr>
             <a:lvl7pPr>
-              <a:defRPr sz="1800"/>
+              <a:defRPr sz="1800" lang="ja-JP"/>
             </a:lvl7pPr>
             <a:lvl8pPr>
-              <a:defRPr sz="1800"/>
+              <a:defRPr sz="1800" lang="ja-JP"/>
             </a:lvl8pPr>
             <a:lvl9pPr>
-              <a:defRPr sz="1800"/>
+              <a:defRPr sz="1800" lang="ja-JP"/>
             </a:lvl9pPr>
           </a:lstStyle>
           <a:p>
             <a:pPr lvl="0"/>
             <a:r>
-              <a:rPr lang="en-US" smtClean="0"/>
+              <a:rPr lang="ja-JP" smtClean="0"/>
               <a:t>Click to edit Master text styles</a:t>
             </a:r>
           </a:p>
           <a:p>
             <a:pPr lvl="1"/>
             <a:r>
-              <a:rPr lang="en-US" smtClean="0"/>
+              <a:rPr lang="ja-JP" smtClean="0"/>
               <a:t>Second level</a:t>
             </a:r>
           </a:p>
           <a:p>
             <a:pPr lvl="2"/>
             <a:r>
-              <a:rPr lang="en-US" smtClean="0"/>
+              <a:rPr lang="ja-JP" smtClean="0"/>
               <a:t>Third level</a:t>
             </a:r>
           </a:p>
           <a:p>
             <a:pPr lvl="3"/>
             <a:r>
-              <a:rPr lang="en-US" smtClean="0"/>
+              <a:rPr lang="ja-JP" smtClean="0"/>
               <a:t>Fourth level</a:t>
             </a:r>
           </a:p>
           <a:p>
             <a:pPr lvl="4"/>
             <a:r>
-              <a:rPr lang="en-US" smtClean="0"/>
+              <a:rPr lang="ja-JP" smtClean="0"/>
               <a:t>Fifth level</a:t>
             </a:r>
-            <a:endParaRPr lang="en-US"/>
+            <a:endParaRPr lang="ja-JP"/>
           </a:p>
         </p:txBody>
       </p:sp>
@@ -2204,68 +2204,68 @@
           <a:bodyPr/>
           <a:lstStyle>
             <a:lvl1pPr>
-              <a:defRPr sz="2800"/>
+              <a:defRPr sz="2800" lang="ja-JP"/>
             </a:lvl1pPr>
             <a:lvl2pPr>
-              <a:defRPr sz="2400"/>
+              <a:defRPr sz="2400" lang="ja-JP"/>
             </a:lvl2pPr>
             <a:lvl3pPr>
-              <a:defRPr sz="2000"/>
+              <a:defRPr sz="2000" lang="ja-JP"/>
             </a:lvl3pPr>
             <a:lvl4pPr>
-              <a:defRPr sz="1800"/>
+              <a:defRPr sz="1800" lang="ja-JP"/>
             </a:lvl4pPr>
             <a:lvl5pPr>
-              <a:defRPr sz="1800"/>
+              <a:defRPr sz="1800" lang="ja-JP"/>
             </a:lvl5pPr>
             <a:lvl6pPr>
-              <a:defRPr sz="1800"/>
+              <a:defRPr sz="1800" lang="ja-JP"/>
             </a:lvl6pPr>
             <a:lvl7pPr>
-              <a:defRPr sz="1800"/>
+              <a:defRPr sz="1800" lang="ja-JP"/>
             </a:lvl7pPr>
             <a:lvl8pPr>
-              <a:defRPr sz="1800"/>
+              <a:defRPr sz="1800" lang="ja-JP"/>
             </a:lvl8pPr>
             <a:lvl9pPr>
-              <a:defRPr sz="1800"/>
+              <a:defRPr sz="1800" lang="ja-JP"/>
             </a:lvl9pPr>
           </a:lstStyle>
           <a:p>
             <a:pPr lvl="0"/>
             <a:r>
-              <a:rPr lang="en-US" smtClean="0"/>
+              <a:rPr lang="ja-JP" smtClean="0"/>
               <a:t>Click to edit Master text styles</a:t>
             </a:r>
           </a:p>
           <a:p>
             <a:pPr lvl="1"/>
             <a:r>
-              <a:rPr lang="en-US" smtClean="0"/>
+              <a:rPr lang="ja-JP" smtClean="0"/>
               <a:t>Second level</a:t>
             </a:r>
           </a:p>
           <a:p>
             <a:pPr lvl="2"/>
             <a:r>
-              <a:rPr lang="en-US" smtClean="0"/>
+              <a:rPr lang="ja-JP" smtClean="0"/>
               <a:t>Third level</a:t>
             </a:r>
           </a:p>
           <a:p>
             <a:pPr lvl="3"/>
             <a:r>
-              <a:rPr lang="en-US" smtClean="0"/>
+              <a:rPr lang="ja-JP" smtClean="0"/>
               <a:t>Fourth level</a:t>
             </a:r>
           </a:p>
           <a:p>
             <a:pPr lvl="4"/>
             <a:r>
-              <a:rPr lang="en-US" smtClean="0"/>
+              <a:rPr lang="ja-JP" smtClean="0"/>
               <a:t>Fifth level</a:t>
             </a:r>
-            <a:endParaRPr lang="en-US"/>
+            <a:endParaRPr lang="ja-JP"/>
           </a:p>
         </p:txBody>
       </p:sp>
@@ -2285,10 +2285,10 @@
           <a:lstStyle/>
           <a:p>
             <a:fld id="{5BCAD085-E8A6-8845-BD4E-CB4CCA059FC4}" type="datetimeFigureOut">
-              <a:rPr lang="en-US" smtClean="0"/>
+              <a:rPr lang="ja-JP" smtClean="0"/>
               <a:t>1/27/13</a:t>
             </a:fld>
-            <a:endParaRPr lang="en-US"/>
+            <a:endParaRPr lang="ja-JP"/>
           </a:p>
         </p:txBody>
       </p:sp>
@@ -2307,7 +2307,7 @@
           <a:bodyPr/>
           <a:lstStyle/>
           <a:p>
-            <a:endParaRPr lang="en-US"/>
+            <a:endParaRPr lang="ja-JP"/>
           </a:p>
         </p:txBody>
       </p:sp>
@@ -2327,10 +2327,10 @@
           <a:lstStyle/>
           <a:p>
             <a:fld id="{C1FF6DA9-008F-8B48-92A6-B652298478BF}" type="slidenum">
-              <a:rPr lang="en-US" smtClean="0"/>
+              <a:rPr lang="ja-JP" smtClean="0"/>
               <a:t>‹#›</a:t>
             </a:fld>
-            <a:endParaRPr lang="en-US"/>
+            <a:endParaRPr lang="ja-JP"/>
           </a:p>
         </p:txBody>
       </p:sp>
@@ -2379,15 +2379,15 @@
           <a:bodyPr/>
           <a:lstStyle>
             <a:lvl1pPr>
-              <a:defRPr/>
+              <a:defRPr lang="ja-JP"/>
             </a:lvl1pPr>
           </a:lstStyle>
           <a:p>
             <a:r>
-              <a:rPr lang="en-US" smtClean="0"/>
+              <a:rPr lang="ja-JP" smtClean="0"/>
               <a:t>Click to edit Master title style</a:t>
             </a:r>
-            <a:endParaRPr lang="en-US"/>
+            <a:endParaRPr lang="ja-JP"/>
           </a:p>
         </p:txBody>
       </p:sp>
@@ -2412,45 +2412,45 @@
           <a:lstStyle>
             <a:lvl1pPr marL="0" indent="0">
               <a:buNone/>
-              <a:defRPr sz="2400" b="1"/>
+              <a:defRPr sz="2400" b="1" lang="ja-JP"/>
             </a:lvl1pPr>
             <a:lvl2pPr marL="457200" indent="0">
               <a:buNone/>
-              <a:defRPr sz="2000" b="1"/>
+              <a:defRPr sz="2000" b="1" lang="ja-JP"/>
             </a:lvl2pPr>
             <a:lvl3pPr marL="914400" indent="0">
               <a:buNone/>
-              <a:defRPr sz="1800" b="1"/>
+              <a:defRPr sz="1800" b="1" lang="ja-JP"/>
             </a:lvl3pPr>
             <a:lvl4pPr marL="1371600" indent="0">
               <a:buNone/>
-              <a:defRPr sz="1600" b="1"/>
+              <a:defRPr sz="1600" b="1" lang="ja-JP"/>
             </a:lvl4pPr>
             <a:lvl5pPr marL="1828800" indent="0">
               <a:buNone/>
-              <a:defRPr sz="1600" b="1"/>
+              <a:defRPr sz="1600" b="1" lang="ja-JP"/>
             </a:lvl5pPr>
             <a:lvl6pPr marL="2286000" indent="0">
               <a:buNone/>
-              <a:defRPr sz="1600" b="1"/>
+              <a:defRPr sz="1600" b="1" lang="ja-JP"/>
             </a:lvl6pPr>
             <a:lvl7pPr marL="2743200" indent="0">
               <a:buNone/>
-              <a:defRPr sz="1600" b="1"/>
+              <a:defRPr sz="1600" b="1" lang="ja-JP"/>
             </a:lvl7pPr>
             <a:lvl8pPr marL="3200400" indent="0">
               <a:buNone/>
-              <a:defRPr sz="1600" b="1"/>
+              <a:defRPr sz="1600" b="1" lang="ja-JP"/>
             </a:lvl8pPr>
             <a:lvl9pPr marL="3657600" indent="0">
               <a:buNone/>
-              <a:defRPr sz="1600" b="1"/>
+              <a:defRPr sz="1600" b="1" lang="ja-JP"/>
             </a:lvl9pPr>
           </a:lstStyle>
           <a:p>
             <a:pPr lvl="0"/>
             <a:r>
-              <a:rPr lang="en-US" smtClean="0"/>
+              <a:rPr lang="ja-JP" smtClean="0"/>
               <a:t>Click to edit Master text styles</a:t>
             </a:r>
           </a:p>
@@ -2476,68 +2476,68 @@
           <a:bodyPr/>
           <a:lstStyle>
             <a:lvl1pPr>
-              <a:defRPr sz="2400"/>
+              <a:defRPr sz="2400" lang="ja-JP"/>
             </a:lvl1pPr>
             <a:lvl2pPr>
-              <a:defRPr sz="2000"/>
+              <a:defRPr sz="2000" lang="ja-JP"/>
             </a:lvl2pPr>
             <a:lvl3pPr>
-              <a:defRPr sz="1800"/>
+              <a:defRPr sz="1800" lang="ja-JP"/>
             </a:lvl3pPr>
             <a:lvl4pPr>
-              <a:defRPr sz="1600"/>
+              <a:defRPr sz="1600" lang="ja-JP"/>
             </a:lvl4pPr>
             <a:lvl5pPr>
-              <a:defRPr sz="1600"/>
+              <a:defRPr sz="1600" lang="ja-JP"/>
             </a:lvl5pPr>
             <a:lvl6pPr>
-              <a:defRPr sz="1600"/>
+              <a:defRPr sz="1600" lang="ja-JP"/>
             </a:lvl6pPr>
             <a:lvl7pPr>
-              <a:defRPr sz="1600"/>
+              <a:defRPr sz="1600" lang="ja-JP"/>
             </a:lvl7pPr>
             <a:lvl8pPr>
-              <a:defRPr sz="1600"/>
+              <a:defRPr sz="1600" lang="ja-JP"/>
             </a:lvl8pPr>
             <a:lvl9pPr>
-              <a:defRPr sz="1600"/>
+              <a:defRPr sz="1600" lang="ja-JP"/>
             </a:lvl9pPr>
           </a:lstStyle>
           <a:p>
             <a:pPr lvl="0"/>
             <a:r>
-              <a:rPr lang="en-US" smtClean="0"/>
+              <a:rPr lang="ja-JP" smtClean="0"/>
               <a:t>Click to edit Master text styles</a:t>
             </a:r>
           </a:p>
           <a:p>
             <a:pPr lvl="1"/>
             <a:r>
-              <a:rPr lang="en-US" smtClean="0"/>
+              <a:rPr lang="ja-JP" smtClean="0"/>
               <a:t>Second level</a:t>
             </a:r>
           </a:p>
           <a:p>
             <a:pPr lvl="2"/>
             <a:r>
-              <a:rPr lang="en-US" smtClean="0"/>
+              <a:rPr lang="ja-JP" smtClean="0"/>
               <a:t>Third level</a:t>
             </a:r>
           </a:p>
           <a:p>
             <a:pPr lvl="3"/>
             <a:r>
-              <a:rPr lang="en-US" smtClean="0"/>
+              <a:rPr lang="ja-JP" smtClean="0"/>
               <a:t>Fourth level</a:t>
             </a:r>
           </a:p>
           <a:p>
             <a:pPr lvl="4"/>
             <a:r>
-              <a:rPr lang="en-US" smtClean="0"/>
+              <a:rPr lang="ja-JP" smtClean="0"/>
               <a:t>Fifth level</a:t>
             </a:r>
-            <a:endParaRPr lang="en-US"/>
+            <a:endParaRPr lang="ja-JP"/>
           </a:p>
         </p:txBody>
       </p:sp>
@@ -2562,45 +2562,45 @@
           <a:lstStyle>
             <a:lvl1pPr marL="0" indent="0">
               <a:buNone/>
-              <a:defRPr sz="2400" b="1"/>
+              <a:defRPr sz="2400" b="1" lang="ja-JP"/>
             </a:lvl1pPr>
             <a:lvl2pPr marL="457200" indent="0">
               <a:buNone/>
-              <a:defRPr sz="2000" b="1"/>
+              <a:defRPr sz="2000" b="1" lang="ja-JP"/>
             </a:lvl2pPr>
             <a:lvl3pPr marL="914400" indent="0">
               <a:buNone/>
-              <a:defRPr sz="1800" b="1"/>
+              <a:defRPr sz="1800" b="1" lang="ja-JP"/>
             </a:lvl3pPr>
             <a:lvl4pPr marL="1371600" indent="0">
               <a:buNone/>
-              <a:defRPr sz="1600" b="1"/>
+              <a:defRPr sz="1600" b="1" lang="ja-JP"/>
             </a:lvl4pPr>
             <a:lvl5pPr marL="1828800" indent="0">
               <a:buNone/>
-              <a:defRPr sz="1600" b="1"/>
+              <a:defRPr sz="1600" b="1" lang="ja-JP"/>
             </a:lvl5pPr>
             <a:lvl6pPr marL="2286000" indent="0">
               <a:buNone/>
-              <a:defRPr sz="1600" b="1"/>
+              <a:defRPr sz="1600" b="1" lang="ja-JP"/>
             </a:lvl6pPr>
             <a:lvl7pPr marL="2743200" indent="0">
               <a:buNone/>
-              <a:defRPr sz="1600" b="1"/>
+              <a:defRPr sz="1600" b="1" lang="ja-JP"/>
             </a:lvl7pPr>
             <a:lvl8pPr marL="3200400" indent="0">
               <a:buNone/>
-              <a:defRPr sz="1600" b="1"/>
+              <a:defRPr sz="1600" b="1" lang="ja-JP"/>
             </a:lvl8pPr>
             <a:lvl9pPr marL="3657600" indent="0">
               <a:buNone/>
-              <a:defRPr sz="1600" b="1"/>
+              <a:defRPr sz="1600" b="1" lang="ja-JP"/>
             </a:lvl9pPr>
           </a:lstStyle>
           <a:p>
             <a:pPr lvl="0"/>
             <a:r>
-              <a:rPr lang="en-US" smtClean="0"/>
+              <a:rPr lang="ja-JP" smtClean="0"/>
               <a:t>Click to edit Master text styles</a:t>
             </a:r>
           </a:p>
@@ -2626,68 +2626,68 @@
           <a:bodyPr/>
           <a:lstStyle>
             <a:lvl1pPr>
-              <a:defRPr sz="2400"/>
+              <a:defRPr sz="2400" lang="ja-JP"/>
             </a:lvl1pPr>
             <a:lvl2pPr>
-              <a:defRPr sz="2000"/>
+              <a:defRPr sz="2000" lang="ja-JP"/>
             </a:lvl2pPr>
             <a:lvl3pPr>
-              <a:defRPr sz="1800"/>
+              <a:defRPr sz="1800" lang="ja-JP"/>
             </a:lvl3pPr>
             <a:lvl4pPr>
-              <a:defRPr sz="1600"/>
+              <a:defRPr sz="1600" lang="ja-JP"/>
             </a:lvl4pPr>
             <a:lvl5pPr>
-              <a:defRPr sz="1600"/>
+              <a:defRPr sz="1600" lang="ja-JP"/>
             </a:lvl5pPr>
             <a:lvl6pPr>
-              <a:defRPr sz="1600"/>
+              <a:defRPr sz="1600" lang="ja-JP"/>
             </a:lvl6pPr>
             <a:lvl7pPr>
-              <a:defRPr sz="1600"/>
+              <a:defRPr sz="1600" lang="ja-JP"/>
             </a:lvl7pPr>
             <a:lvl8pPr>
-              <a:defRPr sz="1600"/>
+              <a:defRPr sz="1600" lang="ja-JP"/>
             </a:lvl8pPr>
             <a:lvl9pPr>
-              <a:defRPr sz="1600"/>
+              <a:defRPr sz="1600" lang="ja-JP"/>
             </a:lvl9pPr>
           </a:lstStyle>
           <a:p>
             <a:pPr lvl="0"/>
             <a:r>
-              <a:rPr lang="en-US" smtClean="0"/>
+              <a:rPr lang="ja-JP" smtClean="0"/>
               <a:t>Click to edit Master text styles</a:t>
             </a:r>
           </a:p>
           <a:p>
             <a:pPr lvl="1"/>
             <a:r>
-              <a:rPr lang="en-US" smtClean="0"/>
+              <a:rPr lang="ja-JP" smtClean="0"/>
               <a:t>Second level</a:t>
             </a:r>
           </a:p>
           <a:p>
             <a:pPr lvl="2"/>
             <a:r>
-              <a:rPr lang="en-US" smtClean="0"/>
+              <a:rPr lang="ja-JP" smtClean="0"/>
               <a:t>Third level</a:t>
             </a:r>
           </a:p>
           <a:p>
             <a:pPr lvl="3"/>
             <a:r>
-              <a:rPr lang="en-US" smtClean="0"/>
+              <a:rPr lang="ja-JP" smtClean="0"/>
               <a:t>Fourth level</a:t>
             </a:r>
           </a:p>
           <a:p>
             <a:pPr lvl="4"/>
             <a:r>
-              <a:rPr lang="en-US" smtClean="0"/>
+              <a:rPr lang="ja-JP" smtClean="0"/>
               <a:t>Fifth level</a:t>
             </a:r>
-            <a:endParaRPr lang="en-US"/>
+            <a:endParaRPr lang="ja-JP"/>
           </a:p>
         </p:txBody>
       </p:sp>
@@ -2707,10 +2707,10 @@
           <a:lstStyle/>
           <a:p>
             <a:fld id="{5BCAD085-E8A6-8845-BD4E-CB4CCA059FC4}" type="datetimeFigureOut">
-              <a:rPr lang="en-US" smtClean="0"/>
+              <a:rPr lang="ja-JP" smtClean="0"/>
               <a:t>1/27/13</a:t>
             </a:fld>
-            <a:endParaRPr lang="en-US"/>
+            <a:endParaRPr lang="ja-JP"/>
           </a:p>
         </p:txBody>
       </p:sp>
@@ -2729,7 +2729,7 @@
           <a:bodyPr/>
           <a:lstStyle/>
           <a:p>
-            <a:endParaRPr lang="en-US"/>
+            <a:endParaRPr lang="ja-JP"/>
           </a:p>
         </p:txBody>
       </p:sp>
@@ -2749,10 +2749,10 @@
           <a:lstStyle/>
           <a:p>
             <a:fld id="{C1FF6DA9-008F-8B48-92A6-B652298478BF}" type="slidenum">
-              <a:rPr lang="en-US" smtClean="0"/>
+              <a:rPr lang="ja-JP" smtClean="0"/>
               <a:t>‹#›</a:t>
             </a:fld>
-            <a:endParaRPr lang="en-US"/>
+            <a:endParaRPr lang="ja-JP"/>
           </a:p>
         </p:txBody>
       </p:sp>
@@ -2802,10 +2802,10 @@
           <a:lstStyle/>
           <a:p>
             <a:r>
-              <a:rPr lang="en-US" smtClean="0"/>
+              <a:rPr lang="ja-JP" smtClean="0"/>
               <a:t>Click to edit Master title style</a:t>
             </a:r>
-            <a:endParaRPr lang="en-US"/>
+            <a:endParaRPr lang="ja-JP"/>
           </a:p>
         </p:txBody>
       </p:sp>
@@ -2825,10 +2825,10 @@
           <a:lstStyle/>
           <a:p>
             <a:fld id="{5BCAD085-E8A6-8845-BD4E-CB4CCA059FC4}" type="datetimeFigureOut">
-              <a:rPr lang="en-US" smtClean="0"/>
+              <a:rPr lang="ja-JP" smtClean="0"/>
               <a:t>1/27/13</a:t>
             </a:fld>
-            <a:endParaRPr lang="en-US"/>
+            <a:endParaRPr lang="ja-JP"/>
           </a:p>
         </p:txBody>
       </p:sp>
@@ -2847,7 +2847,7 @@
           <a:bodyPr/>
           <a:lstStyle/>
           <a:p>
-            <a:endParaRPr lang="en-US"/>
+            <a:endParaRPr lang="ja-JP"/>
           </a:p>
         </p:txBody>
       </p:sp>
@@ -2867,10 +2867,10 @@
           <a:lstStyle/>
           <a:p>
             <a:fld id="{C1FF6DA9-008F-8B48-92A6-B652298478BF}" type="slidenum">
-              <a:rPr lang="en-US" smtClean="0"/>
+              <a:rPr lang="ja-JP" smtClean="0"/>
               <a:t>‹#›</a:t>
             </a:fld>
-            <a:endParaRPr lang="en-US"/>
+            <a:endParaRPr lang="ja-JP"/>
           </a:p>
         </p:txBody>
       </p:sp>
@@ -2920,10 +2920,10 @@
           <a:lstStyle/>
           <a:p>
             <a:fld id="{5BCAD085-E8A6-8845-BD4E-CB4CCA059FC4}" type="datetimeFigureOut">
-              <a:rPr lang="en-US" smtClean="0"/>
+              <a:rPr lang="ja-JP" smtClean="0"/>
               <a:t>1/27/13</a:t>
             </a:fld>
-            <a:endParaRPr lang="en-US"/>
+            <a:endParaRPr lang="ja-JP"/>
           </a:p>
         </p:txBody>
       </p:sp>
@@ -2942,7 +2942,7 @@
           <a:bodyPr/>
           <a:lstStyle/>
           <a:p>
-            <a:endParaRPr lang="en-US"/>
+            <a:endParaRPr lang="ja-JP"/>
           </a:p>
         </p:txBody>
       </p:sp>
@@ -2962,10 +2962,10 @@
           <a:lstStyle/>
           <a:p>
             <a:fld id="{C1FF6DA9-008F-8B48-92A6-B652298478BF}" type="slidenum">
-              <a:rPr lang="en-US" smtClean="0"/>
+              <a:rPr lang="ja-JP" smtClean="0"/>
               <a:t>‹#›</a:t>
             </a:fld>
-            <a:endParaRPr lang="en-US"/>
+            <a:endParaRPr lang="ja-JP"/>
           </a:p>
         </p:txBody>
       </p:sp>
@@ -3019,15 +3019,15 @@
           <a:bodyPr anchor="b"/>
           <a:lstStyle>
             <a:lvl1pPr algn="l">
-              <a:defRPr sz="2000" b="1"/>
+              <a:defRPr sz="2000" b="1" lang="ja-JP"/>
             </a:lvl1pPr>
           </a:lstStyle>
           <a:p>
             <a:r>
-              <a:rPr lang="en-US" smtClean="0"/>
+              <a:rPr lang="ja-JP" smtClean="0"/>
               <a:t>Click to edit Master title style</a:t>
             </a:r>
-            <a:endParaRPr lang="en-US"/>
+            <a:endParaRPr lang="ja-JP"/>
           </a:p>
         </p:txBody>
       </p:sp>
@@ -3051,68 +3051,68 @@
           <a:bodyPr/>
           <a:lstStyle>
             <a:lvl1pPr>
-              <a:defRPr sz="3200"/>
+              <a:defRPr sz="3200" lang="ja-JP"/>
             </a:lvl1pPr>
             <a:lvl2pPr>
-              <a:defRPr sz="2800"/>
+              <a:defRPr sz="2800" lang="ja-JP"/>
             </a:lvl2pPr>
             <a:lvl3pPr>
-              <a:defRPr sz="2400"/>
+              <a:defRPr sz="2400" lang="ja-JP"/>
             </a:lvl3pPr>
             <a:lvl4pPr>
-              <a:defRPr sz="2000"/>
+              <a:defRPr sz="2000" lang="ja-JP"/>
             </a:lvl4pPr>
             <a:lvl5pPr>
-              <a:defRPr sz="2000"/>
+              <a:defRPr sz="2000" lang="ja-JP"/>
             </a:lvl5pPr>
             <a:lvl6pPr>
-              <a:defRPr sz="2000"/>
+              <a:defRPr sz="2000" lang="ja-JP"/>
             </a:lvl6pPr>
             <a:lvl7pPr>
-              <a:defRPr sz="2000"/>
+              <a:defRPr sz="2000" lang="ja-JP"/>
             </a:lvl7pPr>
             <a:lvl8pPr>
-              <a:defRPr sz="2000"/>
+              <a:defRPr sz="2000" lang="ja-JP"/>
             </a:lvl8pPr>
             <a:lvl9pPr>
-              <a:defRPr sz="2000"/>
+              <a:defRPr sz="2000" lang="ja-JP"/>
             </a:lvl9pPr>
           </a:lstStyle>
           <a:p>
             <a:pPr lvl="0"/>
             <a:r>
-              <a:rPr lang="en-US" smtClean="0"/>
+              <a:rPr lang="ja-JP" smtClean="0"/>
               <a:t>Click to edit Master text styles</a:t>
             </a:r>
           </a:p>
           <a:p>
             <a:pPr lvl="1"/>
             <a:r>
-              <a:rPr lang="en-US" smtClean="0"/>
+              <a:rPr lang="ja-JP" smtClean="0"/>
               <a:t>Second level</a:t>
             </a:r>
           </a:p>
           <a:p>
             <a:pPr lvl="2"/>
             <a:r>
-              <a:rPr lang="en-US" smtClean="0"/>
+              <a:rPr lang="ja-JP" smtClean="0"/>
               <a:t>Third level</a:t>
             </a:r>
           </a:p>
           <a:p>
             <a:pPr lvl="3"/>
             <a:r>
-              <a:rPr lang="en-US" smtClean="0"/>
+              <a:rPr lang="ja-JP" smtClean="0"/>
               <a:t>Fourth level</a:t>
             </a:r>
           </a:p>
           <a:p>
             <a:pPr lvl="4"/>
             <a:r>
-              <a:rPr lang="en-US" smtClean="0"/>
+              <a:rPr lang="ja-JP" smtClean="0"/>
               <a:t>Fifth level</a:t>
             </a:r>
-            <a:endParaRPr lang="en-US"/>
+            <a:endParaRPr lang="ja-JP"/>
           </a:p>
         </p:txBody>
       </p:sp>
@@ -3137,45 +3137,45 @@
           <a:lstStyle>
             <a:lvl1pPr marL="0" indent="0">
               <a:buNone/>
-              <a:defRPr sz="1400"/>
+              <a:defRPr sz="1400" lang="ja-JP"/>
             </a:lvl1pPr>
             <a:lvl2pPr marL="457200" indent="0">
               <a:buNone/>
-              <a:defRPr sz="1200"/>
+              <a:defRPr sz="1200" lang="ja-JP"/>
             </a:lvl2pPr>
             <a:lvl3pPr marL="914400" indent="0">
               <a:buNone/>
-              <a:defRPr sz="1000"/>
+              <a:defRPr sz="1000" lang="ja-JP"/>
             </a:lvl3pPr>
             <a:lvl4pPr marL="1371600" indent="0">
               <a:buNone/>
-              <a:defRPr sz="900"/>
+              <a:defRPr sz="900" lang="ja-JP"/>
             </a:lvl4pPr>
             <a:lvl5pPr marL="1828800" indent="0">
               <a:buNone/>
-              <a:defRPr sz="900"/>
+              <a:defRPr sz="900" lang="ja-JP"/>
             </a:lvl5pPr>
             <a:lvl6pPr marL="2286000" indent="0">
               <a:buNone/>
-              <a:defRPr sz="900"/>
+              <a:defRPr sz="900" lang="ja-JP"/>
             </a:lvl6pPr>
             <a:lvl7pPr marL="2743200" indent="0">
               <a:buNone/>
-              <a:defRPr sz="900"/>
+              <a:defRPr sz="900" lang="ja-JP"/>
             </a:lvl7pPr>
             <a:lvl8pPr marL="3200400" indent="0">
               <a:buNone/>
-              <a:defRPr sz="900"/>
+              <a:defRPr sz="900" lang="ja-JP"/>
             </a:lvl8pPr>
             <a:lvl9pPr marL="3657600" indent="0">
               <a:buNone/>
-              <a:defRPr sz="900"/>
+              <a:defRPr sz="900" lang="ja-JP"/>
             </a:lvl9pPr>
           </a:lstStyle>
           <a:p>
             <a:pPr lvl="0"/>
             <a:r>
-              <a:rPr lang="en-US" smtClean="0"/>
+              <a:rPr lang="ja-JP" smtClean="0"/>
               <a:t>Click to edit Master text styles</a:t>
             </a:r>
           </a:p>
@@ -3197,10 +3197,10 @@
           <a:lstStyle/>
           <a:p>
             <a:fld id="{5BCAD085-E8A6-8845-BD4E-CB4CCA059FC4}" type="datetimeFigureOut">
-              <a:rPr lang="en-US" smtClean="0"/>
+              <a:rPr lang="ja-JP" smtClean="0"/>
               <a:t>1/27/13</a:t>
             </a:fld>
-            <a:endParaRPr lang="en-US"/>
+            <a:endParaRPr lang="ja-JP"/>
           </a:p>
         </p:txBody>
       </p:sp>
@@ -3219,7 +3219,7 @@
           <a:bodyPr/>
           <a:lstStyle/>
           <a:p>
-            <a:endParaRPr lang="en-US"/>
+            <a:endParaRPr lang="ja-JP"/>
           </a:p>
         </p:txBody>
       </p:sp>
@@ -3239,10 +3239,10 @@
           <a:lstStyle/>
           <a:p>
             <a:fld id="{C1FF6DA9-008F-8B48-92A6-B652298478BF}" type="slidenum">
-              <a:rPr lang="en-US" smtClean="0"/>
+              <a:rPr lang="ja-JP" smtClean="0"/>
               <a:t>‹#›</a:t>
             </a:fld>
-            <a:endParaRPr lang="en-US"/>
+            <a:endParaRPr lang="ja-JP"/>
           </a:p>
         </p:txBody>
       </p:sp>
@@ -3296,15 +3296,15 @@
           <a:bodyPr anchor="b"/>
           <a:lstStyle>
             <a:lvl1pPr algn="l">
-              <a:defRPr sz="2000" b="1"/>
+              <a:defRPr sz="2000" b="1" lang="ja-JP"/>
             </a:lvl1pPr>
           </a:lstStyle>
           <a:p>
             <a:r>
-              <a:rPr lang="en-US" smtClean="0"/>
+              <a:rPr lang="ja-JP" smtClean="0"/>
               <a:t>Click to edit Master title style</a:t>
             </a:r>
-            <a:endParaRPr lang="en-US"/>
+            <a:endParaRPr lang="ja-JP"/>
           </a:p>
         </p:txBody>
       </p:sp>
@@ -3329,43 +3329,43 @@
           <a:lstStyle>
             <a:lvl1pPr marL="0" indent="0">
               <a:buNone/>
-              <a:defRPr sz="3200"/>
+              <a:defRPr sz="3200" lang="ja-JP"/>
             </a:lvl1pPr>
             <a:lvl2pPr marL="457200" indent="0">
               <a:buNone/>
-              <a:defRPr sz="2800"/>
+              <a:defRPr sz="2800" lang="ja-JP"/>
             </a:lvl2pPr>
             <a:lvl3pPr marL="914400" indent="0">
               <a:buNone/>
-              <a:defRPr sz="2400"/>
+              <a:defRPr sz="2400" lang="ja-JP"/>
             </a:lvl3pPr>
             <a:lvl4pPr marL="1371600" indent="0">
               <a:buNone/>
-              <a:defRPr sz="2000"/>
+              <a:defRPr sz="2000" lang="ja-JP"/>
             </a:lvl4pPr>
             <a:lvl5pPr marL="1828800" indent="0">
               <a:buNone/>
-              <a:defRPr sz="2000"/>
+              <a:defRPr sz="2000" lang="ja-JP"/>
             </a:lvl5pPr>
             <a:lvl6pPr marL="2286000" indent="0">
               <a:buNone/>
-              <a:defRPr sz="2000"/>
+              <a:defRPr sz="2000" lang="ja-JP"/>
             </a:lvl6pPr>
             <a:lvl7pPr marL="2743200" indent="0">
               <a:buNone/>
-              <a:defRPr sz="2000"/>
+              <a:defRPr sz="2000" lang="ja-JP"/>
             </a:lvl7pPr>
             <a:lvl8pPr marL="3200400" indent="0">
               <a:buNone/>
-              <a:defRPr sz="2000"/>
+              <a:defRPr sz="2000" lang="ja-JP"/>
             </a:lvl8pPr>
             <a:lvl9pPr marL="3657600" indent="0">
               <a:buNone/>
-              <a:defRPr sz="2000"/>
+              <a:defRPr sz="2000" lang="ja-JP"/>
             </a:lvl9pPr>
           </a:lstStyle>
           <a:p>
-            <a:endParaRPr lang="en-US"/>
+            <a:endParaRPr lang="ja-JP"/>
           </a:p>
         </p:txBody>
       </p:sp>
@@ -3390,45 +3390,45 @@
           <a:lstStyle>
             <a:lvl1pPr marL="0" indent="0">
               <a:buNone/>
-              <a:defRPr sz="1400"/>
+              <a:defRPr sz="1400" lang="ja-JP"/>
             </a:lvl1pPr>
             <a:lvl2pPr marL="457200" indent="0">
               <a:buNone/>
-              <a:defRPr sz="1200"/>
+              <a:defRPr sz="1200" lang="ja-JP"/>
             </a:lvl2pPr>
             <a:lvl3pPr marL="914400" indent="0">
               <a:buNone/>
-              <a:defRPr sz="1000"/>
+              <a:defRPr sz="1000" lang="ja-JP"/>
             </a:lvl3pPr>
             <a:lvl4pPr marL="1371600" indent="0">
               <a:buNone/>
-              <a:defRPr sz="900"/>
+              <a:defRPr sz="900" lang="ja-JP"/>
             </a:lvl4pPr>
             <a:lvl5pPr marL="1828800" indent="0">
               <a:buNone/>
-              <a:defRPr sz="900"/>
+              <a:defRPr sz="900" lang="ja-JP"/>
             </a:lvl5pPr>
             <a:lvl6pPr marL="2286000" indent="0">
               <a:buNone/>
-              <a:defRPr sz="900"/>
+              <a:defRPr sz="900" lang="ja-JP"/>
             </a:lvl6pPr>
             <a:lvl7pPr marL="2743200" indent="0">
               <a:buNone/>
-              <a:defRPr sz="900"/>
+              <a:defRPr sz="900" lang="ja-JP"/>
             </a:lvl7pPr>
             <a:lvl8pPr marL="3200400" indent="0">
               <a:buNone/>
-              <a:defRPr sz="900"/>
+              <a:defRPr sz="900" lang="ja-JP"/>
             </a:lvl8pPr>
             <a:lvl9pPr marL="3657600" indent="0">
               <a:buNone/>
-              <a:defRPr sz="900"/>
+              <a:defRPr sz="900" lang="ja-JP"/>
             </a:lvl9pPr>
           </a:lstStyle>
           <a:p>
             <a:pPr lvl="0"/>
             <a:r>
-              <a:rPr lang="en-US" smtClean="0"/>
+              <a:rPr lang="ja-JP" smtClean="0"/>
               <a:t>Click to edit Master text styles</a:t>
             </a:r>
           </a:p>
@@ -3450,10 +3450,10 @@
           <a:lstStyle/>
           <a:p>
             <a:fld id="{5BCAD085-E8A6-8845-BD4E-CB4CCA059FC4}" type="datetimeFigureOut">
-              <a:rPr lang="en-US" smtClean="0"/>
+              <a:rPr lang="ja-JP" smtClean="0"/>
               <a:t>1/27/13</a:t>
             </a:fld>
-            <a:endParaRPr lang="en-US"/>
+            <a:endParaRPr lang="ja-JP"/>
           </a:p>
         </p:txBody>
       </p:sp>
@@ -3472,7 +3472,7 @@
           <a:bodyPr/>
           <a:lstStyle/>
           <a:p>
-            <a:endParaRPr lang="en-US"/>
+            <a:endParaRPr lang="ja-JP"/>
           </a:p>
         </p:txBody>
       </p:sp>
@@ -3492,10 +3492,10 @@
           <a:lstStyle/>
           <a:p>
             <a:fld id="{C1FF6DA9-008F-8B48-92A6-B652298478BF}" type="slidenum">
-              <a:rPr lang="en-US" smtClean="0"/>
+              <a:rPr lang="ja-JP" smtClean="0"/>
               <a:t>‹#›</a:t>
             </a:fld>
-            <a:endParaRPr lang="en-US"/>
+            <a:endParaRPr lang="ja-JP"/>
           </a:p>
         </p:txBody>
       </p:sp>
@@ -3560,10 +3560,10 @@
           <a:lstStyle/>
           <a:p>
             <a:r>
-              <a:rPr lang="en-US" smtClean="0"/>
+              <a:rPr lang="ja-JP" smtClean="0"/>
               <a:t>Click to edit Master title style</a:t>
             </a:r>
-            <a:endParaRPr lang="en-US"/>
+            <a:endParaRPr lang="ja-JP"/>
           </a:p>
         </p:txBody>
       </p:sp>
@@ -3594,38 +3594,38 @@
           <a:p>
             <a:pPr lvl="0"/>
             <a:r>
-              <a:rPr lang="en-US" smtClean="0"/>
+              <a:rPr lang="ja-JP" smtClean="0"/>
               <a:t>Click to edit Master text styles</a:t>
             </a:r>
           </a:p>
           <a:p>
             <a:pPr lvl="1"/>
             <a:r>
-              <a:rPr lang="en-US" smtClean="0"/>
+              <a:rPr lang="ja-JP" smtClean="0"/>
               <a:t>Second level</a:t>
             </a:r>
           </a:p>
           <a:p>
             <a:pPr lvl="2"/>
             <a:r>
-              <a:rPr lang="en-US" smtClean="0"/>
+              <a:rPr lang="ja-JP" smtClean="0"/>
               <a:t>Third level</a:t>
             </a:r>
           </a:p>
           <a:p>
             <a:pPr lvl="3"/>
             <a:r>
-              <a:rPr lang="en-US" smtClean="0"/>
+              <a:rPr lang="ja-JP" smtClean="0"/>
               <a:t>Fourth level</a:t>
             </a:r>
           </a:p>
           <a:p>
             <a:pPr lvl="4"/>
             <a:r>
-              <a:rPr lang="en-US" smtClean="0"/>
+              <a:rPr lang="ja-JP" smtClean="0"/>
               <a:t>Fifth level</a:t>
             </a:r>
-            <a:endParaRPr lang="en-US"/>
+            <a:endParaRPr lang="ja-JP"/>
           </a:p>
         </p:txBody>
       </p:sp>
@@ -3652,7 +3652,7 @@
           <a:bodyPr vert="horz" lIns="91440" tIns="45720" rIns="91440" bIns="45720" rtlCol="0" anchor="ctr"/>
           <a:lstStyle>
             <a:lvl1pPr algn="l">
-              <a:defRPr sz="1200">
+              <a:defRPr sz="1200" lang="ja-JP">
                 <a:solidFill>
                   <a:schemeClr val="tx1">
                     <a:tint val="75000"/>
@@ -3663,10 +3663,10 @@
           </a:lstStyle>
           <a:p>
             <a:fld id="{5BCAD085-E8A6-8845-BD4E-CB4CCA059FC4}" type="datetimeFigureOut">
-              <a:rPr lang="en-US" smtClean="0"/>
+              <a:rPr lang="ja-JP" smtClean="0"/>
               <a:t>1/27/13</a:t>
             </a:fld>
-            <a:endParaRPr lang="en-US"/>
+            <a:endParaRPr lang="ja-JP"/>
           </a:p>
         </p:txBody>
       </p:sp>
@@ -3693,7 +3693,7 @@
           <a:bodyPr vert="horz" lIns="91440" tIns="45720" rIns="91440" bIns="45720" rtlCol="0" anchor="ctr"/>
           <a:lstStyle>
             <a:lvl1pPr algn="ctr">
-              <a:defRPr sz="1200">
+              <a:defRPr sz="1200" lang="ja-JP">
                 <a:solidFill>
                   <a:schemeClr val="tx1">
                     <a:tint val="75000"/>
@@ -3703,7 +3703,7 @@
             </a:lvl1pPr>
           </a:lstStyle>
           <a:p>
-            <a:endParaRPr lang="en-US"/>
+            <a:endParaRPr lang="ja-JP"/>
           </a:p>
         </p:txBody>
       </p:sp>
@@ -3730,7 +3730,7 @@
           <a:bodyPr vert="horz" lIns="91440" tIns="45720" rIns="91440" bIns="45720" rtlCol="0" anchor="ctr"/>
           <a:lstStyle>
             <a:lvl1pPr algn="r">
-              <a:defRPr sz="1200">
+              <a:defRPr sz="1200" lang="ja-JP">
                 <a:solidFill>
                   <a:schemeClr val="tx1">
                     <a:tint val="75000"/>
@@ -3741,10 +3741,10 @@
           </a:lstStyle>
           <a:p>
             <a:fld id="{C1FF6DA9-008F-8B48-92A6-B652298478BF}" type="slidenum">
-              <a:rPr lang="en-US" smtClean="0"/>
+              <a:rPr lang="ja-JP" smtClean="0"/>
               <a:t>‹#›</a:t>
             </a:fld>
-            <a:endParaRPr lang="en-US"/>
+            <a:endParaRPr lang="ja-JP"/>
           </a:p>
         </p:txBody>
       </p:sp>
@@ -3776,7 +3776,7 @@
           <a:spcPct val="0"/>
         </a:spcBef>
         <a:buNone/>
-        <a:defRPr sz="4400" kern="1200">
+        <a:defRPr sz="4400" kern="1200" lang="ja-JP">
           <a:solidFill>
             <a:schemeClr val="tx1"/>
           </a:solidFill>
@@ -3793,7 +3793,7 @@
         </a:spcBef>
         <a:buFont typeface="Arial"/>
         <a:buChar char="•"/>
-        <a:defRPr sz="3200" kern="1200">
+        <a:defRPr sz="3200" kern="1200" lang="ja-JP">
           <a:solidFill>
             <a:schemeClr val="tx1"/>
           </a:solidFill>
@@ -3808,7 +3808,7 @@
         </a:spcBef>
         <a:buFont typeface="Arial"/>
         <a:buChar char="–"/>
-        <a:defRPr sz="2800" kern="1200">
+        <a:defRPr sz="2800" kern="1200" lang="ja-JP">
           <a:solidFill>
             <a:schemeClr val="tx1"/>
           </a:solidFill>
@@ -3823,7 +3823,7 @@
         </a:spcBef>
         <a:buFont typeface="Arial"/>
         <a:buChar char="•"/>
-        <a:defRPr sz="2400" kern="1200">
+        <a:defRPr sz="2400" kern="1200" lang="ja-JP">
           <a:solidFill>
             <a:schemeClr val="tx1"/>
           </a:solidFill>
@@ -3838,7 +3838,7 @@
         </a:spcBef>
         <a:buFont typeface="Arial"/>
         <a:buChar char="–"/>
-        <a:defRPr sz="2000" kern="1200">
+        <a:defRPr sz="2000" kern="1200" lang="ja-JP">
           <a:solidFill>
             <a:schemeClr val="tx1"/>
           </a:solidFill>
@@ -3853,7 +3853,7 @@
         </a:spcBef>
         <a:buFont typeface="Arial"/>
         <a:buChar char="»"/>
-        <a:defRPr sz="2000" kern="1200">
+        <a:defRPr sz="2000" kern="1200" lang="ja-JP">
           <a:solidFill>
             <a:schemeClr val="tx1"/>
           </a:solidFill>
@@ -3868,7 +3868,7 @@
         </a:spcBef>
         <a:buFont typeface="Arial"/>
         <a:buChar char="•"/>
-        <a:defRPr sz="2000" kern="1200">
+        <a:defRPr sz="2000" kern="1200" lang="ja-JP">
           <a:solidFill>
             <a:schemeClr val="tx1"/>
           </a:solidFill>
@@ -3883,7 +3883,7 @@
         </a:spcBef>
         <a:buFont typeface="Arial"/>
         <a:buChar char="•"/>
-        <a:defRPr sz="2000" kern="1200">
+        <a:defRPr sz="2000" kern="1200" lang="ja-JP">
           <a:solidFill>
             <a:schemeClr val="tx1"/>
           </a:solidFill>
@@ -3898,7 +3898,7 @@
         </a:spcBef>
         <a:buFont typeface="Arial"/>
         <a:buChar char="•"/>
-        <a:defRPr sz="2000" kern="1200">
+        <a:defRPr sz="2000" kern="1200" lang="ja-JP">
           <a:solidFill>
             <a:schemeClr val="tx1"/>
           </a:solidFill>
@@ -3913,7 +3913,7 @@
         </a:spcBef>
         <a:buFont typeface="Arial"/>
         <a:buChar char="•"/>
-        <a:defRPr sz="2000" kern="1200">
+        <a:defRPr sz="2000" kern="1200" lang="ja-JP">
           <a:solidFill>
             <a:schemeClr val="tx1"/>
           </a:solidFill>
@@ -3925,10 +3925,10 @@
     </p:bodyStyle>
     <p:otherStyle>
       <a:defPPr>
-        <a:defRPr lang="en-US"/>
+        <a:defRPr lang="ja-JP"/>
       </a:defPPr>
       <a:lvl1pPr marL="0" algn="l" defTabSz="457200" rtl="0" eaLnBrk="1" latinLnBrk="0" hangingPunct="1">
-        <a:defRPr sz="1800" kern="1200">
+        <a:defRPr sz="1800" kern="1200" lang="ja-JP">
           <a:solidFill>
             <a:schemeClr val="tx1"/>
           </a:solidFill>
@@ -3938,7 +3938,7 @@
         </a:defRPr>
       </a:lvl1pPr>
       <a:lvl2pPr marL="457200" algn="l" defTabSz="457200" rtl="0" eaLnBrk="1" latinLnBrk="0" hangingPunct="1">
-        <a:defRPr sz="1800" kern="1200">
+        <a:defRPr sz="1800" kern="1200" lang="ja-JP">
           <a:solidFill>
             <a:schemeClr val="tx1"/>
           </a:solidFill>
@@ -3948,7 +3948,7 @@
         </a:defRPr>
       </a:lvl2pPr>
       <a:lvl3pPr marL="914400" algn="l" defTabSz="457200" rtl="0" eaLnBrk="1" latinLnBrk="0" hangingPunct="1">
-        <a:defRPr sz="1800" kern="1200">
+        <a:defRPr sz="1800" kern="1200" lang="ja-JP">
           <a:solidFill>
             <a:schemeClr val="tx1"/>
           </a:solidFill>
@@ -3958,7 +3958,7 @@
         </a:defRPr>
       </a:lvl3pPr>
       <a:lvl4pPr marL="1371600" algn="l" defTabSz="457200" rtl="0" eaLnBrk="1" latinLnBrk="0" hangingPunct="1">
-        <a:defRPr sz="1800" kern="1200">
+        <a:defRPr sz="1800" kern="1200" lang="ja-JP">
           <a:solidFill>
             <a:schemeClr val="tx1"/>
           </a:solidFill>
@@ -3968,7 +3968,7 @@
         </a:defRPr>
       </a:lvl4pPr>
       <a:lvl5pPr marL="1828800" algn="l" defTabSz="457200" rtl="0" eaLnBrk="1" latinLnBrk="0" hangingPunct="1">
-        <a:defRPr sz="1800" kern="1200">
+        <a:defRPr sz="1800" kern="1200" lang="ja-JP">
           <a:solidFill>
             <a:schemeClr val="tx1"/>
           </a:solidFill>
@@ -3978,7 +3978,7 @@
         </a:defRPr>
       </a:lvl5pPr>
       <a:lvl6pPr marL="2286000" algn="l" defTabSz="457200" rtl="0" eaLnBrk="1" latinLnBrk="0" hangingPunct="1">
-        <a:defRPr sz="1800" kern="1200">
+        <a:defRPr sz="1800" kern="1200" lang="ja-JP">
           <a:solidFill>
             <a:schemeClr val="tx1"/>
           </a:solidFill>
@@ -3988,7 +3988,7 @@
         </a:defRPr>
       </a:lvl6pPr>
       <a:lvl7pPr marL="2743200" algn="l" defTabSz="457200" rtl="0" eaLnBrk="1" latinLnBrk="0" hangingPunct="1">
-        <a:defRPr sz="1800" kern="1200">
+        <a:defRPr sz="1800" kern="1200" lang="ja-JP">
           <a:solidFill>
             <a:schemeClr val="tx1"/>
           </a:solidFill>
@@ -3998,7 +3998,7 @@
         </a:defRPr>
       </a:lvl7pPr>
       <a:lvl8pPr marL="3200400" algn="l" defTabSz="457200" rtl="0" eaLnBrk="1" latinLnBrk="0" hangingPunct="1">
-        <a:defRPr sz="1800" kern="1200">
+        <a:defRPr sz="1800" kern="1200" lang="ja-JP">
           <a:solidFill>
             <a:schemeClr val="tx1"/>
           </a:solidFill>
@@ -4008,7 +4008,7 @@
         </a:defRPr>
       </a:lvl8pPr>
       <a:lvl9pPr marL="3657600" algn="l" defTabSz="457200" rtl="0" eaLnBrk="1" latinLnBrk="0" hangingPunct="1">
-        <a:defRPr sz="1800" kern="1200">
+        <a:defRPr sz="1800" kern="1200" lang="ja-JP">
           <a:solidFill>
             <a:schemeClr val="tx1"/>
           </a:solidFill>
@@ -4062,7 +4062,7 @@
               <a:buNone/>
             </a:pPr>
             <a:r>
-              <a:rPr sz="6800" b="1" i="0">
+              <a:rPr sz="6800" b="1" i="0" lang="ja-JP">
                 <a:solidFill>
                   <a:srgbClr val="000000"/>
                 </a:solidFill>
@@ -4105,7 +4105,7 @@
               <a:buNone/>
             </a:pPr>
             <a:r>
-              <a:rPr sz="3200" b="0" i="0">
+              <a:rPr sz="3200" b="0" i="0" lang="ja-JP">
                 <a:solidFill>
                   <a:srgbClr val="404040"/>
                 </a:solidFill>
@@ -4148,7 +4148,7 @@
               <a:buNone/>
             </a:pPr>
             <a:r>
-              <a:rPr sz="3800" b="1" i="0">
+              <a:rPr sz="3800" b="1" i="0" lang="ja-JP">
                 <a:solidFill>
                   <a:srgbClr val="000000"/>
                 </a:solidFill>
@@ -4159,7 +4159,7 @@
               <a:t>中野 友晴</a:t>
             </a:r>
             <a:r>
-              <a:rPr sz="3800" b="0" i="0">
+              <a:rPr sz="3800" b="0" i="0" lang="ja-JP">
                 <a:solidFill>
                   <a:srgbClr val="000000"/>
                 </a:solidFill>
@@ -4288,7 +4288,7 @@
               <a:buNone/>
             </a:pPr>
             <a:r>
-              <a:rPr sz="4800" b="1" i="0">
+              <a:rPr sz="4800" b="1" i="0" lang="ja-JP">
                 <a:solidFill>
                   <a:srgbClr val="FFFFFF"/>
                 </a:solidFill>
@@ -4377,7 +4377,7 @@
               <a:buNone/>
             </a:pPr>
             <a:r>
-              <a:rPr sz="3600" b="1" i="0">
+              <a:rPr sz="3600" b="1" i="0" lang="ja-JP">
                 <a:solidFill>
                   <a:srgbClr val="000000"/>
                 </a:solidFill>
@@ -4466,7 +4466,7 @@
               <a:buNone/>
             </a:pPr>
             <a:r>
-              <a:rPr sz="3200" b="1" i="0">
+              <a:rPr sz="3200" b="1" i="0" lang="ja-JP">
                 <a:solidFill>
                   <a:srgbClr val="70AD47"/>
                 </a:solidFill>
@@ -4477,7 +4477,7 @@
               <a:t>① </a:t>
             </a:r>
             <a:r>
-              <a:rPr sz="3200" b="1" i="0">
+              <a:rPr sz="3200" b="1" i="0" lang="ja-JP">
                 <a:solidFill>
                   <a:srgbClr val="000000"/>
                 </a:solidFill>
@@ -4499,7 +4499,7 @@
               <a:buNone/>
             </a:pPr>
             <a:r>
-              <a:rPr sz="3800" b="1" i="0">
+              <a:rPr sz="3800" b="1" i="0" lang="ja-JP">
                 <a:solidFill>
                   <a:srgbClr val="C00000"/>
                 </a:solidFill>
@@ -4588,7 +4588,7 @@
               <a:buNone/>
             </a:pPr>
             <a:r>
-              <a:rPr sz="3200" b="1" i="0">
+              <a:rPr sz="3200" b="1" i="0" lang="ja-JP">
                 <a:solidFill>
                   <a:srgbClr val="70AD47"/>
                 </a:solidFill>
@@ -4599,7 +4599,7 @@
               <a:t>② </a:t>
             </a:r>
             <a:r>
-              <a:rPr sz="3200" b="1" i="0">
+              <a:rPr sz="3200" b="1" i="0" lang="ja-JP">
                 <a:solidFill>
                   <a:srgbClr val="000000"/>
                 </a:solidFill>
@@ -4621,7 +4621,7 @@
               <a:buNone/>
             </a:pPr>
             <a:r>
-              <a:rPr sz="3800" b="1" i="0">
+              <a:rPr sz="3800" b="1" i="0" lang="ja-JP">
                 <a:solidFill>
                   <a:srgbClr val="000000"/>
                 </a:solidFill>
@@ -4710,7 +4710,7 @@
               <a:buNone/>
             </a:pPr>
             <a:r>
-              <a:rPr sz="3200" b="1" i="0">
+              <a:rPr sz="3200" b="1" i="0" lang="ja-JP">
                 <a:solidFill>
                   <a:srgbClr val="70AD47"/>
                 </a:solidFill>
@@ -4721,7 +4721,7 @@
               <a:t>③ </a:t>
             </a:r>
             <a:r>
-              <a:rPr sz="3200" b="1" i="0">
+              <a:rPr sz="3200" b="1" i="0" lang="ja-JP">
                 <a:solidFill>
                   <a:srgbClr val="000000"/>
                 </a:solidFill>
@@ -4743,7 +4743,7 @@
               <a:buNone/>
             </a:pPr>
             <a:r>
-              <a:rPr sz="3800" b="1" i="0">
+              <a:rPr sz="3800" b="1" i="0" lang="ja-JP">
                 <a:solidFill>
                   <a:srgbClr val="C00000"/>
                 </a:solidFill>
@@ -4828,7 +4828,7 @@
               <a:buNone/>
             </a:pPr>
             <a:r>
-              <a:rPr sz="4000" b="1" i="0">
+              <a:rPr sz="4000" b="1" i="0" lang="ja-JP">
                 <a:solidFill>
                   <a:srgbClr val="FFFFFF"/>
                 </a:solidFill>
@@ -4871,7 +4871,7 @@
               <a:buNone/>
             </a:pPr>
             <a:r>
-              <a:rPr sz="3600" b="0" i="0">
+              <a:rPr sz="3600" b="0" i="0" lang="ja-JP">
                 <a:solidFill>
                   <a:srgbClr val="000000"/>
                 </a:solidFill>
@@ -4893,7 +4893,7 @@
               <a:buNone/>
             </a:pPr>
             <a:r>
-              <a:rPr sz="3600" b="1" i="0">
+              <a:rPr sz="3600" b="1" i="0" lang="ja-JP">
                 <a:solidFill>
                   <a:srgbClr val="000000"/>
                 </a:solidFill>
@@ -4904,7 +4904,7 @@
               <a:t>Waniら[1]　</a:t>
             </a:r>
             <a:r>
-              <a:rPr sz="3600" b="0" i="0">
+              <a:rPr sz="3600" b="0" i="0" lang="ja-JP">
                 <a:solidFill>
                   <a:srgbClr val="000000"/>
                 </a:solidFill>
@@ -4926,7 +4926,7 @@
               <a:buNone/>
             </a:pPr>
             <a:r>
-              <a:rPr sz="3600" b="0" i="0">
+              <a:rPr sz="3600" b="0" i="0" lang="ja-JP">
                 <a:solidFill>
                   <a:srgbClr val="000000"/>
                 </a:solidFill>
@@ -5015,7 +5015,7 @@
               <a:buNone/>
             </a:pPr>
             <a:r>
-              <a:rPr sz="3600" b="1" i="0">
+              <a:rPr sz="3600" b="1" i="0" lang="ja-JP">
                 <a:solidFill>
                   <a:srgbClr val="70AD47"/>
                 </a:solidFill>
@@ -5026,7 +5026,7 @@
               <a:t>仮説　</a:t>
             </a:r>
             <a:r>
-              <a:rPr sz="3600" b="1" i="0">
+              <a:rPr sz="3600" b="1" i="0" lang="ja-JP">
                 <a:solidFill>
                   <a:srgbClr val="000000"/>
                 </a:solidFill>
@@ -5111,7 +5111,7 @@
               <a:buNone/>
             </a:pPr>
             <a:r>
-              <a:rPr sz="4000" b="1" i="0">
+              <a:rPr sz="4000" b="1" i="0" lang="ja-JP">
                 <a:solidFill>
                   <a:srgbClr val="FFFFFF"/>
                 </a:solidFill>
@@ -5178,7 +5178,7 @@
               <a:buNone/>
             </a:pPr>
             <a:r>
-              <a:rPr sz="2600" b="0" i="0">
+              <a:rPr sz="2600" b="0" i="0" lang="ja-JP">
                 <a:solidFill>
                   <a:srgbClr val="000000"/>
                 </a:solidFill>
@@ -5221,7 +5221,7 @@
               <a:buNone/>
             </a:pPr>
             <a:r>
-              <a:rPr sz="3600" b="1" i="0">
+              <a:rPr sz="3600" b="1" i="0" lang="ja-JP">
                 <a:solidFill>
                   <a:srgbClr val="000000"/>
                 </a:solidFill>
@@ -5232,7 +5232,7 @@
               <a:t>タスク署名　</a:t>
             </a:r>
             <a:r>
-              <a:rPr sz="3600" b="0" i="0">
+              <a:rPr sz="3600" b="0" i="0" lang="ja-JP">
                 <a:solidFill>
                   <a:srgbClr val="000000"/>
                 </a:solidFill>
@@ -5283,7 +5283,7 @@
                         <a:buNone/>
                       </a:pPr>
                       <a:r>
-                        <a:rPr sz="3000" b="1" i="0">
+                        <a:rPr sz="3000" b="1" i="0" lang="ja-JP">
                           <a:solidFill>
                             <a:srgbClr val="FFFFFF"/>
                           </a:solidFill>
@@ -5316,7 +5316,7 @@
                         <a:buNone/>
                       </a:pPr>
                       <a:r>
-                        <a:rPr sz="3000" b="1" i="0">
+                        <a:rPr sz="3000" b="1" i="0" lang="ja-JP">
                           <a:solidFill>
                             <a:srgbClr val="FFFFFF"/>
                           </a:solidFill>
@@ -5351,7 +5351,7 @@
                         <a:buNone/>
                       </a:pPr>
                       <a:r>
-                        <a:rPr sz="3000" b="0" i="0">
+                        <a:rPr sz="3000" b="0" i="0" lang="ja-JP">
                           <a:solidFill>
                             <a:srgbClr val="000000"/>
                           </a:solidFill>
@@ -5384,7 +5384,7 @@
                         <a:buNone/>
                       </a:pPr>
                       <a:r>
-                        <a:rPr sz="3000" b="0" i="0">
+                        <a:rPr sz="3000" b="0" i="0" lang="ja-JP">
                           <a:solidFill>
                             <a:srgbClr val="000000"/>
                           </a:solidFill>
@@ -5419,7 +5419,7 @@
                         <a:buNone/>
                       </a:pPr>
                       <a:r>
-                        <a:rPr sz="3000" b="0" i="0">
+                        <a:rPr sz="3000" b="0" i="0" lang="ja-JP">
                           <a:solidFill>
                             <a:srgbClr val="000000"/>
                           </a:solidFill>
@@ -5452,7 +5452,7 @@
                         <a:buNone/>
                       </a:pPr>
                       <a:r>
-                        <a:rPr sz="3000" b="0" i="0">
+                        <a:rPr sz="3000" b="0" i="0" lang="ja-JP">
                           <a:solidFill>
                             <a:srgbClr val="000000"/>
                           </a:solidFill>
@@ -5487,7 +5487,7 @@
                         <a:buNone/>
                       </a:pPr>
                       <a:r>
-                        <a:rPr sz="3000" b="0" i="0">
+                        <a:rPr sz="3000" b="0" i="0" lang="ja-JP">
                           <a:solidFill>
                             <a:srgbClr val="000000"/>
                           </a:solidFill>
@@ -5520,7 +5520,7 @@
                         <a:buNone/>
                       </a:pPr>
                       <a:r>
-                        <a:rPr sz="3000" b="0" i="0">
+                        <a:rPr sz="3000" b="0" i="0" lang="ja-JP">
                           <a:solidFill>
                             <a:srgbClr val="000000"/>
                           </a:solidFill>
@@ -5573,7 +5573,7 @@
               <a:buNone/>
             </a:pPr>
             <a:r>
-              <a:rPr sz="3600" b="1" i="0">
+              <a:rPr sz="3600" b="1" i="0" lang="ja-JP">
                 <a:solidFill>
                   <a:srgbClr val="000000"/>
                 </a:solidFill>
@@ -5584,7 +5584,7 @@
               <a:t>学習　</a:t>
             </a:r>
             <a:r>
-              <a:rPr sz="3600" b="0" i="0">
+              <a:rPr sz="3600" b="0" i="0" lang="ja-JP">
                 <a:solidFill>
                   <a:srgbClr val="000000"/>
                 </a:solidFill>
@@ -5595,7 +5595,7 @@
               <a:t>ℒ = ℒ</a:t>
             </a:r>
             <a:r>
-              <a:rPr sz="2000" b="0" i="0">
+              <a:rPr sz="2000" b="0" i="0" lang="ja-JP">
                 <a:solidFill>
                   <a:srgbClr val="000000"/>
                 </a:solidFill>
@@ -5606,7 +5606,7 @@
               <a:t>LM</a:t>
             </a:r>
             <a:r>
-              <a:rPr sz="3600" b="0" i="0">
+              <a:rPr sz="3600" b="0" i="0" lang="ja-JP">
                 <a:solidFill>
                   <a:srgbClr val="000000"/>
                 </a:solidFill>
@@ -5617,7 +5617,7 @@
               <a:t> + 𝜆ℒ</a:t>
             </a:r>
             <a:r>
-              <a:rPr sz="2000" b="0" i="0">
+              <a:rPr sz="2000" b="0" i="0" lang="ja-JP">
                 <a:solidFill>
                   <a:srgbClr val="000000"/>
                 </a:solidFill>
@@ -5628,7 +5628,7 @@
               <a:t>align</a:t>
             </a:r>
             <a:r>
-              <a:rPr sz="3600" b="0" i="0">
+              <a:rPr sz="3600" b="0" i="0" lang="ja-JP">
                 <a:solidFill>
                   <a:srgbClr val="000000"/>
                 </a:solidFill>
@@ -5639,7 +5639,7 @@
               <a:t>，</a:t>
             </a:r>
             <a:r>
-              <a:rPr sz="3600" b="0" i="0">
+              <a:rPr sz="3600" b="0" i="0" lang="ja-JP">
                 <a:solidFill>
                   <a:srgbClr val="000000"/>
                 </a:solidFill>
@@ -5662,7 +5662,7 @@
               <a:buChar char="•"/>
             </a:pPr>
             <a:r>
-              <a:rPr sz="3000" b="0" i="0">
+              <a:rPr sz="3000" b="0" i="0" lang="ja-JP">
                 <a:solidFill>
                   <a:srgbClr val="000000"/>
                 </a:solidFill>
@@ -5673,7 +5673,7 @@
               <a:t>整合損失</a:t>
             </a:r>
             <a:r>
-              <a:rPr sz="3000" b="0" i="0">
+              <a:rPr sz="3000" b="0" i="0" lang="ja-JP">
                 <a:solidFill>
                   <a:srgbClr val="000000"/>
                 </a:solidFill>
@@ -5684,7 +5684,7 @@
               <a:t>ℒ</a:t>
             </a:r>
             <a:r>
-              <a:rPr sz="2000" b="0" i="0">
+              <a:rPr sz="2000" b="0" i="0" lang="ja-JP">
                 <a:solidFill>
                   <a:srgbClr val="000000"/>
                 </a:solidFill>
@@ -5695,7 +5695,7 @@
               <a:t>align</a:t>
             </a:r>
             <a:r>
-              <a:rPr sz="3000" b="0" i="0">
+              <a:rPr sz="3000" b="0" i="0" lang="ja-JP">
                 <a:solidFill>
                   <a:srgbClr val="000000"/>
                 </a:solidFill>
@@ -5706,7 +5706,7 @@
               <a:t>は，署名をクラスとする supervised contrastive loss[4]．射影を挟まず，第16層・入力末尾の内部表現</a:t>
             </a:r>
             <a:r>
-              <a:rPr sz="3000" b="0" i="0">
+              <a:rPr sz="3000" b="0" i="0" lang="ja-JP">
                 <a:solidFill>
                   <a:srgbClr val="000000"/>
                 </a:solidFill>
@@ -5717,7 +5717,7 @@
               <a:t>𝒉</a:t>
             </a:r>
             <a:r>
-              <a:rPr sz="3000" b="0" i="0">
+              <a:rPr sz="3000" b="0" i="0" lang="ja-JP">
                 <a:solidFill>
                   <a:srgbClr val="000000"/>
                 </a:solidFill>
@@ -5740,7 +5740,7 @@
               <a:buChar char="•"/>
             </a:pPr>
             <a:r>
-              <a:rPr sz="3000" b="0" i="0">
+              <a:rPr sz="3000" b="0" i="0" lang="ja-JP">
                 <a:solidFill>
                   <a:srgbClr val="000000"/>
                 </a:solidFill>
@@ -5825,7 +5825,7 @@
               <a:buNone/>
             </a:pPr>
             <a:r>
-              <a:rPr sz="4000" b="1" i="0">
+              <a:rPr sz="4000" b="1" i="0" lang="ja-JP">
                 <a:solidFill>
                   <a:srgbClr val="FFFFFF"/>
                 </a:solidFill>
@@ -5868,7 +5868,7 @@
               <a:buNone/>
             </a:pPr>
             <a:r>
-              <a:rPr sz="3000" b="1" i="0">
+              <a:rPr sz="3000" b="1" i="0" lang="ja-JP">
                 <a:solidFill>
                   <a:srgbClr val="000000"/>
                 </a:solidFill>
@@ -5879,7 +5879,7 @@
               <a:t>モデル　</a:t>
             </a:r>
             <a:r>
-              <a:rPr sz="3000" b="0" i="0">
+              <a:rPr sz="3000" b="0" i="0" lang="ja-JP">
                 <a:solidFill>
                   <a:srgbClr val="000000"/>
                 </a:solidFill>
@@ -5901,7 +5901,7 @@
               <a:buNone/>
             </a:pPr>
             <a:r>
-              <a:rPr sz="3000" b="1" i="0">
+              <a:rPr sz="3000" b="1" i="0" lang="ja-JP">
                 <a:solidFill>
                   <a:srgbClr val="000000"/>
                 </a:solidFill>
@@ -5912,7 +5912,7 @@
               <a:t>学習　</a:t>
             </a:r>
             <a:r>
-              <a:rPr sz="3000" b="0" i="0">
+              <a:rPr sz="3000" b="0" i="0" lang="ja-JP">
                 <a:solidFill>
                   <a:srgbClr val="000000"/>
                 </a:solidFill>
@@ -5934,7 +5934,7 @@
               <a:buNone/>
             </a:pPr>
             <a:r>
-              <a:rPr sz="3000" b="1" i="0">
+              <a:rPr sz="3000" b="1" i="0" lang="ja-JP">
                 <a:solidFill>
                   <a:srgbClr val="000000"/>
                 </a:solidFill>
@@ -5945,7 +5945,7 @@
               <a:t>評価　</a:t>
             </a:r>
             <a:r>
-              <a:rPr sz="3000" b="0" i="0">
+              <a:rPr sz="3000" b="0" i="0" lang="ja-JP">
                 <a:solidFill>
                   <a:srgbClr val="000000"/>
                 </a:solidFill>
@@ -5997,7 +5997,7 @@
                         <a:buNone/>
                       </a:pPr>
                       <a:r>
-                        <a:rPr sz="2700" b="1" i="0">
+                        <a:rPr sz="2700" b="1" i="0" lang="ja-JP">
                           <a:solidFill>
                             <a:srgbClr val="FFFFFF"/>
                           </a:solidFill>
@@ -6030,7 +6030,7 @@
                         <a:buNone/>
                       </a:pPr>
                       <a:r>
-                        <a:rPr sz="2700" b="1" i="0">
+                        <a:rPr sz="2700" b="1" i="0" lang="ja-JP">
                           <a:solidFill>
                             <a:srgbClr val="FFFFFF"/>
                           </a:solidFill>
@@ -6063,7 +6063,7 @@
                         <a:buNone/>
                       </a:pPr>
                       <a:r>
-                        <a:rPr sz="2700" b="1" i="0">
+                        <a:rPr sz="2700" b="1" i="0" lang="ja-JP">
                           <a:solidFill>
                             <a:srgbClr val="FFFFFF"/>
                           </a:solidFill>
@@ -6098,7 +6098,7 @@
                         <a:buNone/>
                       </a:pPr>
                       <a:r>
-                        <a:rPr sz="2700" b="0" i="0">
+                        <a:rPr sz="2700" b="0" i="0" lang="ja-JP">
                           <a:solidFill>
                             <a:srgbClr val="000000"/>
                           </a:solidFill>
@@ -6131,7 +6131,7 @@
                         <a:buNone/>
                       </a:pPr>
                       <a:r>
-                        <a:rPr sz="2700" b="0" i="0">
+                        <a:rPr sz="2700" b="0" i="0" lang="ja-JP">
                           <a:solidFill>
                             <a:srgbClr val="000000"/>
                           </a:solidFill>
@@ -6164,7 +6164,7 @@
                         <a:buNone/>
                       </a:pPr>
                       <a:r>
-                        <a:rPr sz="2700" b="0" i="0">
+                        <a:rPr sz="2700" b="0" i="0" lang="ja-JP">
                           <a:solidFill>
                             <a:srgbClr val="000000"/>
                           </a:solidFill>
@@ -6199,7 +6199,7 @@
                         <a:buNone/>
                       </a:pPr>
                       <a:r>
-                        <a:rPr sz="2700" b="1" i="0">
+                        <a:rPr sz="2700" b="1" i="0" lang="ja-JP">
                           <a:solidFill>
                             <a:srgbClr val="000000"/>
                           </a:solidFill>
@@ -6232,7 +6232,7 @@
                         <a:buNone/>
                       </a:pPr>
                       <a:r>
-                        <a:rPr sz="2700" b="1" i="0">
+                        <a:rPr sz="2700" b="1" i="0" lang="ja-JP">
                           <a:solidFill>
                             <a:srgbClr val="000000"/>
                           </a:solidFill>
@@ -6265,7 +6265,7 @@
                         <a:buNone/>
                       </a:pPr>
                       <a:r>
-                        <a:rPr sz="2700" b="1" i="0">
+                        <a:rPr sz="2700" b="1" i="0" lang="ja-JP">
                           <a:solidFill>
                             <a:srgbClr val="000000"/>
                           </a:solidFill>
@@ -6300,7 +6300,7 @@
                         <a:buNone/>
                       </a:pPr>
                       <a:r>
-                        <a:rPr sz="2700" b="0" i="0">
+                        <a:rPr sz="2700" b="0" i="0" lang="ja-JP">
                           <a:solidFill>
                             <a:srgbClr val="000000"/>
                           </a:solidFill>
@@ -6333,7 +6333,7 @@
                         <a:buNone/>
                       </a:pPr>
                       <a:r>
-                        <a:rPr sz="2700" b="0" i="0">
+                        <a:rPr sz="2700" b="0" i="0" lang="ja-JP">
                           <a:solidFill>
                             <a:srgbClr val="000000"/>
                           </a:solidFill>
@@ -6366,7 +6366,7 @@
                         <a:buNone/>
                       </a:pPr>
                       <a:r>
-                        <a:rPr sz="2700" b="0" i="0">
+                        <a:rPr sz="2700" b="0" i="0" lang="ja-JP">
                           <a:solidFill>
                             <a:srgbClr val="000000"/>
                           </a:solidFill>
@@ -6419,7 +6419,7 @@
               <a:buNone/>
             </a:pPr>
             <a:r>
-              <a:rPr sz="2700" b="0" i="0">
+              <a:rPr sz="2700" b="0" i="0" lang="ja-JP">
                 <a:solidFill>
                   <a:srgbClr val="404040"/>
                 </a:solidFill>
@@ -6504,7 +6504,7 @@
               <a:buNone/>
             </a:pPr>
             <a:r>
-              <a:rPr sz="4000" b="1" i="0">
+              <a:rPr sz="4000" b="1" i="0" lang="ja-JP">
                 <a:solidFill>
                   <a:srgbClr val="FFFFFF"/>
                 </a:solidFill>
@@ -6547,7 +6547,7 @@
               <a:buNone/>
             </a:pPr>
             <a:r>
-              <a:rPr sz="3400" b="1" i="0">
+              <a:rPr sz="3400" b="1" i="0" lang="ja-JP">
                 <a:solidFill>
                   <a:srgbClr val="70AD47"/>
                 </a:solidFill>
@@ -6590,7 +6590,7 @@
               <a:buNone/>
             </a:pPr>
             <a:r>
-              <a:rPr sz="2700" b="0" i="0">
+              <a:rPr sz="2700" b="0" i="0" lang="ja-JP">
                 <a:solidFill>
                   <a:srgbClr val="000000"/>
                 </a:solidFill>
@@ -6601,7 +6601,7 @@
               <a:t>𝒉</a:t>
             </a:r>
             <a:r>
-              <a:rPr sz="2700" b="0" i="0">
+              <a:rPr sz="2700" b="0" i="0" lang="ja-JP">
                 <a:solidFill>
                   <a:srgbClr val="000000"/>
                 </a:solidFill>
@@ -6662,7 +6662,7 @@
               <a:buNone/>
             </a:pPr>
             <a:r>
-              <a:rPr sz="4400" b="1" i="0">
+              <a:rPr sz="4400" b="1" i="0" lang="ja-JP">
                 <a:solidFill>
                   <a:srgbClr val="C00000"/>
                 </a:solidFill>
@@ -6684,7 +6684,7 @@
               <a:buNone/>
             </a:pPr>
             <a:r>
-              <a:rPr sz="2700" b="0" i="0">
+              <a:rPr sz="2700" b="0" i="0" lang="ja-JP">
                 <a:solidFill>
                   <a:srgbClr val="000000"/>
                 </a:solidFill>
@@ -6727,7 +6727,7 @@
               <a:buNone/>
             </a:pPr>
             <a:r>
-              <a:rPr sz="3400" b="1" i="0">
+              <a:rPr sz="3400" b="1" i="0" lang="ja-JP">
                 <a:solidFill>
                   <a:srgbClr val="70AD47"/>
                 </a:solidFill>
@@ -6780,7 +6780,7 @@
                         <a:buNone/>
                       </a:pPr>
                       <a:r>
-                        <a:rPr sz="2700" b="1" i="0">
+                        <a:rPr sz="2700" b="1" i="0" lang="ja-JP">
                           <a:solidFill>
                             <a:srgbClr val="FFFFFF"/>
                           </a:solidFill>
@@ -6813,7 +6813,7 @@
                         <a:buNone/>
                       </a:pPr>
                       <a:r>
-                        <a:rPr sz="2700" b="1" i="0">
+                        <a:rPr sz="2700" b="1" i="0" lang="ja-JP">
                           <a:solidFill>
                             <a:srgbClr val="FFFFFF"/>
                           </a:solidFill>
@@ -6846,7 +6846,7 @@
                         <a:buNone/>
                       </a:pPr>
                       <a:r>
-                        <a:rPr sz="2700" b="1" i="0">
+                        <a:rPr sz="2700" b="1" i="0" lang="ja-JP">
                           <a:solidFill>
                             <a:srgbClr val="FFFFFF"/>
                           </a:solidFill>
@@ -6879,7 +6879,7 @@
                         <a:buNone/>
                       </a:pPr>
                       <a:r>
-                        <a:rPr sz="2700" b="1" i="0">
+                        <a:rPr sz="2700" b="1" i="0" lang="ja-JP">
                           <a:solidFill>
                             <a:srgbClr val="FFFFFF"/>
                           </a:solidFill>
@@ -6914,7 +6914,7 @@
                         <a:buNone/>
                       </a:pPr>
                       <a:r>
-                        <a:rPr sz="2700" b="0" i="0">
+                        <a:rPr sz="2700" b="0" i="0" lang="ja-JP">
                           <a:solidFill>
                             <a:srgbClr val="000000"/>
                           </a:solidFill>
@@ -6947,7 +6947,7 @@
                         <a:buNone/>
                       </a:pPr>
                       <a:r>
-                        <a:rPr sz="2700" b="0" i="0">
+                        <a:rPr sz="2700" b="0" i="0" lang="ja-JP">
                           <a:solidFill>
                             <a:srgbClr val="000000"/>
                           </a:solidFill>
@@ -6980,7 +6980,7 @@
                         <a:buNone/>
                       </a:pPr>
                       <a:r>
-                        <a:rPr sz="2700" b="0" i="0">
+                        <a:rPr sz="2700" b="0" i="0" lang="ja-JP">
                           <a:solidFill>
                             <a:srgbClr val="000000"/>
                           </a:solidFill>
@@ -7013,7 +7013,7 @@
                         <a:buNone/>
                       </a:pPr>
                       <a:r>
-                        <a:rPr sz="2700" b="0" i="0">
+                        <a:rPr sz="2700" b="0" i="0" lang="ja-JP">
                           <a:solidFill>
                             <a:srgbClr val="000000"/>
                           </a:solidFill>
@@ -7067,7 +7067,7 @@
               <a:buChar char="•"/>
             </a:pPr>
             <a:r>
-              <a:rPr sz="2700" b="0" i="0">
+              <a:rPr sz="2700" b="0" i="0" lang="ja-JP">
                 <a:solidFill>
                   <a:srgbClr val="000000"/>
                 </a:solidFill>
@@ -7090,7 +7090,7 @@
               <a:buChar char="•"/>
             </a:pPr>
             <a:r>
-              <a:rPr sz="2700" b="0" i="0">
+              <a:rPr sz="2700" b="0" i="0" lang="ja-JP">
                 <a:solidFill>
                   <a:srgbClr val="000000"/>
                 </a:solidFill>
@@ -7133,7 +7133,7 @@
               <a:buNone/>
             </a:pPr>
             <a:r>
-              <a:rPr sz="3400" b="1" i="0">
+              <a:rPr sz="3400" b="1" i="0" lang="ja-JP">
                 <a:solidFill>
                   <a:srgbClr val="70AD47"/>
                 </a:solidFill>
@@ -7176,7 +7176,7 @@
               <a:buNone/>
             </a:pPr>
             <a:r>
-              <a:rPr sz="3000" b="1" i="0">
+              <a:rPr sz="3000" b="1" i="0" lang="ja-JP">
                 <a:solidFill>
                   <a:srgbClr val="000000"/>
                 </a:solidFill>
@@ -7187,7 +7187,7 @@
               <a:t>相対感度　</a:t>
             </a:r>
             <a:r>
-              <a:rPr sz="3000" b="0" i="0">
+              <a:rPr sz="3000" b="0" i="0" lang="ja-JP">
                 <a:solidFill>
                   <a:srgbClr val="000000"/>
                 </a:solidFill>
@@ -7198,7 +7198,7 @@
               <a:t>𝑒 = ‖𝑱</a:t>
             </a:r>
             <a:r>
-              <a:rPr sz="2000" b="0" i="0">
+              <a:rPr sz="2000" b="0" i="0" lang="ja-JP">
                 <a:solidFill>
                   <a:srgbClr val="000000"/>
                 </a:solidFill>
@@ -7209,7 +7209,7 @@
               <a:t>⊤</a:t>
             </a:r>
             <a:r>
-              <a:rPr sz="3000" b="0" i="0">
+              <a:rPr sz="3000" b="0" i="0" lang="ja-JP">
                 <a:solidFill>
                   <a:srgbClr val="000000"/>
                 </a:solidFill>
@@ -7231,7 +7231,7 @@
               <a:buNone/>
             </a:pPr>
             <a:r>
-              <a:rPr sz="2700" b="0" i="0">
+              <a:rPr sz="2700" b="0" i="0" lang="ja-JP">
                 <a:solidFill>
                   <a:srgbClr val="404040"/>
                 </a:solidFill>
@@ -7242,7 +7242,7 @@
               <a:t>𝒉</a:t>
             </a:r>
             <a:r>
-              <a:rPr sz="2700" b="0" i="0">
+              <a:rPr sz="2700" b="0" i="0" lang="ja-JP">
                 <a:solidFill>
                   <a:srgbClr val="404040"/>
                 </a:solidFill>
@@ -7253,7 +7253,7 @@
               <a:t>を1%動かしたとき，正規化した出力</a:t>
             </a:r>
             <a:r>
-              <a:rPr sz="2700" b="0" i="0">
+              <a:rPr sz="2700" b="0" i="0" lang="ja-JP">
                 <a:solidFill>
                   <a:srgbClr val="404040"/>
                 </a:solidFill>
@@ -7264,7 +7264,7 @@
               <a:t>𝒓</a:t>
             </a:r>
             <a:r>
-              <a:rPr sz="2700" b="0" i="0">
+              <a:rPr sz="2700" b="0" i="0" lang="ja-JP">
                 <a:solidFill>
                   <a:srgbClr val="404040"/>
                 </a:solidFill>
@@ -7275,7 +7275,7 @@
               <a:t>が回答を決める方向</a:t>
             </a:r>
             <a:r>
-              <a:rPr sz="2700" b="0" i="0">
+              <a:rPr sz="2700" b="0" i="0" lang="ja-JP">
                 <a:solidFill>
                   <a:srgbClr val="404040"/>
                 </a:solidFill>
@@ -7286,7 +7286,7 @@
               <a:t>𝒖</a:t>
             </a:r>
             <a:r>
-              <a:rPr sz="2700" b="0" i="0">
+              <a:rPr sz="2700" b="0" i="0" lang="ja-JP">
                 <a:solidFill>
                   <a:srgbClr val="404040"/>
                 </a:solidFill>
@@ -7297,7 +7297,7 @@
               <a:t>へ最大で何%動くか．</a:t>
             </a:r>
             <a:r>
-              <a:rPr sz="2700" b="0" i="0">
+              <a:rPr sz="2700" b="0" i="0" lang="ja-JP">
                 <a:solidFill>
                   <a:srgbClr val="404040"/>
                 </a:solidFill>
@@ -7308,7 +7308,7 @@
               <a:t>𝒖</a:t>
             </a:r>
             <a:r>
-              <a:rPr sz="2700" b="0" i="0">
+              <a:rPr sz="2700" b="0" i="0" lang="ja-JP">
                 <a:solidFill>
                   <a:srgbClr val="404040"/>
                 </a:solidFill>
@@ -7319,7 +7319,7 @@
               <a:t>は回答の候補の出力層の行の主成分（上位</a:t>
             </a:r>
             <a:r>
-              <a:rPr sz="2700" b="0" i="0">
+              <a:rPr sz="2700" b="0" i="0" lang="ja-JP">
                 <a:solidFill>
                   <a:srgbClr val="404040"/>
                 </a:solidFill>
@@ -7330,7 +7330,7 @@
               <a:t>𝑚</a:t>
             </a:r>
             <a:r>
-              <a:rPr sz="2700" b="0" i="0">
+              <a:rPr sz="2700" b="0" i="0" lang="ja-JP">
                 <a:solidFill>
                   <a:srgbClr val="404040"/>
                 </a:solidFill>
@@ -7341,7 +7341,7 @@
               <a:t>本），</a:t>
             </a:r>
             <a:r>
-              <a:rPr sz="2700" b="0" i="0">
+              <a:rPr sz="2700" b="0" i="0" lang="ja-JP">
                 <a:solidFill>
                   <a:srgbClr val="404040"/>
                 </a:solidFill>
@@ -7352,7 +7352,7 @@
               <a:t>𝑱</a:t>
             </a:r>
             <a:r>
-              <a:rPr sz="2700" b="0" i="0">
+              <a:rPr sz="2700" b="0" i="0" lang="ja-JP">
                 <a:solidFill>
                   <a:srgbClr val="404040"/>
                 </a:solidFill>
@@ -7413,7 +7413,7 @@
               <a:buNone/>
             </a:pPr>
             <a:r>
-              <a:rPr sz="2700" b="1" i="0">
+              <a:rPr sz="2700" b="1" i="0" lang="ja-JP">
                 <a:solidFill>
                   <a:srgbClr val="C00000"/>
                 </a:solidFill>
@@ -7424,7 +7424,7 @@
               <a:t>proposal は baseline より18–28%低い</a:t>
             </a:r>
             <a:r>
-              <a:rPr sz="2700" b="0" i="0">
+              <a:rPr sz="2700" b="0" i="0" lang="ja-JP">
                 <a:solidFill>
                   <a:srgbClr val="000000"/>
                 </a:solidFill>
@@ -7509,7 +7509,7 @@
               <a:buNone/>
             </a:pPr>
             <a:r>
-              <a:rPr sz="4000" b="1" i="0">
+              <a:rPr sz="4000" b="1" i="0" lang="ja-JP">
                 <a:solidFill>
                   <a:srgbClr val="FFFFFF"/>
                 </a:solidFill>
@@ -7552,7 +7552,7 @@
               <a:buNone/>
             </a:pPr>
             <a:r>
-              <a:rPr sz="2700" b="0" i="0">
+              <a:rPr sz="2700" b="0" i="0" lang="ja-JP">
                 <a:solidFill>
                   <a:srgbClr val="000000"/>
                 </a:solidFill>
@@ -7563,7 +7563,7 @@
               <a:t>予稿以降に測定．Waniら[1]の加工8族23通りを評価データの全問に施し，第16層の</a:t>
             </a:r>
             <a:r>
-              <a:rPr sz="2700" b="0" i="0">
+              <a:rPr sz="2700" b="0" i="0" lang="ja-JP">
                 <a:solidFill>
                   <a:srgbClr val="000000"/>
                 </a:solidFill>
@@ -7574,7 +7574,7 @@
               <a:t>𝒉</a:t>
             </a:r>
             <a:r>
-              <a:rPr sz="2700" b="0" i="0">
+              <a:rPr sz="2700" b="0" i="0" lang="ja-JP">
                 <a:solidFill>
                   <a:srgbClr val="000000"/>
                 </a:solidFill>
@@ -7641,7 +7641,7 @@
               <a:buNone/>
             </a:pPr>
             <a:r>
-              <a:rPr sz="1800" b="0" i="0">
+              <a:rPr sz="1800" b="0" i="0" lang="ja-JP">
                 <a:solidFill>
                   <a:srgbClr val="000000"/>
                 </a:solidFill>
@@ -7708,7 +7708,7 @@
               <a:buNone/>
             </a:pPr>
             <a:r>
-              <a:rPr sz="1800" b="0" i="0">
+              <a:rPr sz="1800" b="0" i="0" lang="ja-JP">
                 <a:solidFill>
                   <a:srgbClr val="000000"/>
                 </a:solidFill>
@@ -7775,7 +7775,7 @@
               <a:buNone/>
             </a:pPr>
             <a:r>
-              <a:rPr sz="1800" b="0" i="0">
+              <a:rPr sz="1800" b="0" i="0" lang="ja-JP">
                 <a:solidFill>
                   <a:srgbClr val="000000"/>
                 </a:solidFill>
@@ -7842,7 +7842,7 @@
               <a:buNone/>
             </a:pPr>
             <a:r>
-              <a:rPr sz="1800" b="0" i="0">
+              <a:rPr sz="1800" b="0" i="0" lang="ja-JP">
                 <a:solidFill>
                   <a:srgbClr val="000000"/>
                 </a:solidFill>
@@ -7909,7 +7909,7 @@
               <a:buNone/>
             </a:pPr>
             <a:r>
-              <a:rPr sz="1800" b="0" i="0">
+              <a:rPr sz="1800" b="0" i="0" lang="ja-JP">
                 <a:solidFill>
                   <a:srgbClr val="000000"/>
                 </a:solidFill>
@@ -7952,7 +7952,7 @@
               <a:buNone/>
             </a:pPr>
             <a:r>
-              <a:rPr sz="1800" b="0" i="0">
+              <a:rPr sz="1800" b="0" i="0" lang="ja-JP">
                 <a:solidFill>
                   <a:srgbClr val="595959"/>
                 </a:solidFill>
@@ -7995,7 +7995,7 @@
               <a:buNone/>
             </a:pPr>
             <a:r>
-              <a:rPr sz="2700" b="1" i="0">
+              <a:rPr sz="2700" b="1" i="0" lang="ja-JP">
                 <a:solidFill>
                   <a:srgbClr val="000000"/>
                 </a:solidFill>
@@ -8006,7 +8006,7 @@
               <a:t>比</a:t>
             </a:r>
             <a:r>
-              <a:rPr sz="2700" b="0" i="0">
+              <a:rPr sz="2700" b="0" i="0" lang="ja-JP">
                 <a:solidFill>
                   <a:srgbClr val="000000"/>
                 </a:solidFill>
@@ -8067,7 +8067,7 @@
               <a:buNone/>
             </a:pPr>
             <a:r>
-              <a:rPr sz="2200" b="0" i="0">
+              <a:rPr sz="2200" b="0" i="0" lang="ja-JP">
                 <a:solidFill>
                   <a:srgbClr val="595959"/>
                 </a:solidFill>
@@ -8111,7 +8111,7 @@
               <a:buChar char="•"/>
             </a:pPr>
             <a:r>
-              <a:rPr sz="2700" b="1" i="0">
+              <a:rPr sz="2700" b="1" i="0" lang="ja-JP">
                 <a:solidFill>
                   <a:srgbClr val="000000"/>
                 </a:solidFill>
@@ -8122,7 +8122,7 @@
               <a:t>23通りすべて　</a:t>
             </a:r>
             <a:r>
-              <a:rPr sz="2700" b="0" i="0">
+              <a:rPr sz="2700" b="0" i="0" lang="ja-JP">
                 <a:solidFill>
                   <a:srgbClr val="000000"/>
                 </a:solidFill>
@@ -8145,7 +8145,7 @@
               <a:buChar char="•"/>
             </a:pPr>
             <a:r>
-              <a:rPr sz="2700" b="1" i="0">
+              <a:rPr sz="2700" b="1" i="0" lang="ja-JP">
                 <a:solidFill>
                   <a:srgbClr val="000000"/>
                 </a:solidFill>
@@ -8156,7 +8156,7 @@
               <a:t>ablation より小さい　</a:t>
             </a:r>
             <a:r>
-              <a:rPr sz="2700" b="0" i="0">
+              <a:rPr sz="2700" b="0" i="0" lang="ja-JP">
                 <a:solidFill>
                   <a:srgbClr val="000000"/>
                 </a:solidFill>
@@ -8179,7 +8179,7 @@
               <a:buChar char="•"/>
             </a:pPr>
             <a:r>
-              <a:rPr sz="2700" b="1" i="0">
+              <a:rPr sz="2700" b="1" i="0" lang="ja-JP">
                 <a:solidFill>
                   <a:srgbClr val="000000"/>
                 </a:solidFill>
@@ -8190,7 +8190,7 @@
               <a:t>baseline との差は向きが未決　</a:t>
             </a:r>
             <a:r>
-              <a:rPr sz="2700" b="0" i="0">
+              <a:rPr sz="2700" b="0" i="0" lang="ja-JP">
                 <a:solidFill>
                   <a:srgbClr val="000000"/>
                 </a:solidFill>
@@ -8213,7 +8213,7 @@
               <a:buChar char="•"/>
             </a:pPr>
             <a:r>
-              <a:rPr sz="2700" b="0" i="0">
+              <a:rPr sz="2700" b="0" i="0" lang="ja-JP">
                 <a:solidFill>
                   <a:srgbClr val="000000"/>
                 </a:solidFill>
@@ -8298,7 +8298,7 @@
               <a:buNone/>
             </a:pPr>
             <a:r>
-              <a:rPr sz="4000" b="1" i="0">
+              <a:rPr sz="4000" b="1" i="0" lang="ja-JP">
                 <a:solidFill>
                   <a:srgbClr val="FFFFFF"/>
                 </a:solidFill>
@@ -8387,7 +8387,7 @@
               <a:buNone/>
             </a:pPr>
             <a:r>
-              <a:rPr sz="3400" b="1" i="0">
+              <a:rPr sz="3400" b="1" i="0" lang="ja-JP">
                 <a:solidFill>
                   <a:srgbClr val="000000"/>
                 </a:solidFill>
@@ -8431,7 +8431,7 @@
               <a:buChar char="•"/>
             </a:pPr>
             <a:r>
-              <a:rPr sz="2700" b="0" i="0">
+              <a:rPr sz="2700" b="0" i="0" lang="ja-JP">
                 <a:solidFill>
                   <a:srgbClr val="000000"/>
                 </a:solidFill>
@@ -8454,7 +8454,7 @@
               <a:buChar char="•"/>
             </a:pPr>
             <a:r>
-              <a:rPr sz="2700" b="1" i="0">
+              <a:rPr sz="2700" b="1" i="0" lang="ja-JP">
                 <a:solidFill>
                   <a:srgbClr val="000000"/>
                 </a:solidFill>
@@ -8465,7 +8465,7 @@
               <a:t>今後　</a:t>
             </a:r>
             <a:r>
-              <a:rPr sz="2700" b="0" i="0">
+              <a:rPr sz="2700" b="0" i="0" lang="ja-JP">
                 <a:solidFill>
                   <a:srgbClr val="000000"/>
                 </a:solidFill>
@@ -8488,7 +8488,7 @@
               <a:buChar char="•"/>
             </a:pPr>
             <a:r>
-              <a:rPr sz="2700" b="1" i="0">
+              <a:rPr sz="2700" b="1" i="0" lang="ja-JP">
                 <a:solidFill>
                   <a:srgbClr val="000000"/>
                 </a:solidFill>
@@ -8499,7 +8499,7 @@
               <a:t>限界　</a:t>
             </a:r>
             <a:r>
-              <a:rPr sz="2700" b="0" i="0">
+              <a:rPr sz="2700" b="0" i="0" lang="ja-JP">
                 <a:solidFill>
                   <a:srgbClr val="000000"/>
                 </a:solidFill>
@@ -8510,7 +8510,7 @@
               <a:t>1モデル・1データセット・第16層・</a:t>
             </a:r>
             <a:r>
-              <a:rPr sz="2700" b="0" i="0">
+              <a:rPr sz="2700" b="0" i="0" lang="ja-JP">
                 <a:solidFill>
                   <a:srgbClr val="000000"/>
                 </a:solidFill>
@@ -8521,7 +8521,7 @@
               <a:t>𝜆 = 0.1</a:t>
             </a:r>
             <a:r>
-              <a:rPr sz="2700" b="0" i="0">
+              <a:rPr sz="2700" b="0" i="0" lang="ja-JP">
                 <a:solidFill>
                   <a:srgbClr val="000000"/>
                 </a:solidFill>
@@ -8610,7 +8610,7 @@
               <a:buNone/>
             </a:pPr>
             <a:r>
-              <a:rPr sz="2700" b="1" i="0">
+              <a:rPr sz="2700" b="1" i="0" lang="ja-JP">
                 <a:solidFill>
                   <a:srgbClr val="70AD47"/>
                 </a:solidFill>
@@ -8621,7 +8621,7 @@
               <a:t>研究の意義　</a:t>
             </a:r>
             <a:r>
-              <a:rPr sz="2700" b="0" i="0">
+              <a:rPr sz="2700" b="0" i="0" lang="ja-JP">
                 <a:solidFill>
                   <a:srgbClr val="000000"/>
                 </a:solidFill>
@@ -8643,7 +8643,7 @@
               <a:buNone/>
             </a:pPr>
             <a:r>
-              <a:rPr sz="2700" b="1" i="0">
+              <a:rPr sz="2700" b="1" i="0" lang="ja-JP">
                 <a:solidFill>
                   <a:srgbClr val="000000"/>
                 </a:solidFill>
@@ -8686,7 +8686,7 @@
               <a:buNone/>
             </a:pPr>
             <a:r>
-              <a:rPr sz="1500" b="0" i="0">
+              <a:rPr sz="1500" b="0" i="0" lang="ja-JP">
                 <a:solidFill>
                   <a:srgbClr val="404040"/>
                 </a:solidFill>
@@ -8708,7 +8708,7 @@
               <a:buNone/>
             </a:pPr>
             <a:r>
-              <a:rPr sz="1500" b="0" i="0">
+              <a:rPr sz="1500" b="0" i="0" lang="ja-JP">
                 <a:solidFill>
                   <a:srgbClr val="404040"/>
                 </a:solidFill>
@@ -8730,7 +8730,7 @@
               <a:buNone/>
             </a:pPr>
             <a:r>
-              <a:rPr sz="1500" b="0" i="0">
+              <a:rPr sz="1500" b="0" i="0" lang="ja-JP">
                 <a:solidFill>
                   <a:srgbClr val="404040"/>
                 </a:solidFill>
@@ -8752,7 +8752,7 @@
               <a:buNone/>
             </a:pPr>
             <a:r>
-              <a:rPr sz="1500" b="0" i="0">
+              <a:rPr sz="1500" b="0" i="0" lang="ja-JP">
                 <a:solidFill>
                   <a:srgbClr val="404040"/>
                 </a:solidFill>
@@ -8774,7 +8774,7 @@
               <a:buNone/>
             </a:pPr>
             <a:r>
-              <a:rPr sz="1500" b="0" i="0">
+              <a:rPr sz="1500" b="0" i="0" lang="ja-JP">
                 <a:solidFill>
                   <a:srgbClr val="404040"/>
                 </a:solidFill>
@@ -8838,10 +8838,10 @@
     </a:clrScheme>
     <a:fontScheme name="Office">
       <a:majorFont>
-        <a:latin typeface="Calibri"/>
-        <a:ea typeface=""/>
+        <a:latin typeface="游ゴシック"/>
+        <a:ea typeface="游ゴシック"/>
         <a:cs typeface=""/>
-        <a:font script="Jpan" typeface="ＭＳ Ｐゴシック"/>
+        <a:font script="Jpan" typeface="游ゴシック"/>
         <a:font script="Hang" typeface="맑은 고딕"/>
         <a:font script="Hans" typeface="宋体"/>
         <a:font script="Hant" typeface="新細明體"/>
@@ -8873,10 +8873,10 @@
         <a:font script="Geor" typeface="Sylfaen"/>
       </a:majorFont>
       <a:minorFont>
-        <a:latin typeface="Calibri"/>
-        <a:ea typeface=""/>
+        <a:latin typeface="游ゴシック"/>
+        <a:ea typeface="游ゴシック"/>
         <a:cs typeface=""/>
-        <a:font script="Jpan" typeface="ＭＳ Ｐゴシック"/>
+        <a:font script="Jpan" typeface="游ゴシック"/>
         <a:font script="Hang" typeface="맑은 고딕"/>
         <a:font script="Hans" typeface="宋体"/>
         <a:font script="Hant" typeface="新細明體"/>

--- a/presentations/20261116_PCSJ-IMPS2026_ポスター初案.pptx
+++ b/presentations/20261116_PCSJ-IMPS2026_ポスター初案.pptx
@@ -4947,7 +4947,7 @@
         </p:nvSpPr>
         <p:spPr>
           <a:xfrm>
-            <a:off x="792000" y="11337553"/>
+            <a:off x="792000" y="11625553"/>
             <a:ext cx="13308000" cy="2105457"/>
           </a:xfrm>
           <a:prstGeom prst="roundRect">
@@ -4993,7 +4993,7 @@
         </p:nvSpPr>
         <p:spPr>
           <a:xfrm>
-            <a:off x="1008000" y="11553553"/>
+            <a:off x="1008000" y="11841553"/>
             <a:ext cx="12876000" cy="1673457"/>
           </a:xfrm>
           <a:prstGeom prst="rect">
@@ -5047,7 +5047,7 @@
         </p:nvSpPr>
         <p:spPr>
           <a:xfrm>
-            <a:off x="792000" y="13695011"/>
+            <a:off x="792000" y="14271011"/>
             <a:ext cx="13308000" cy="684000"/>
           </a:xfrm>
           <a:prstGeom prst="rect">
@@ -5089,7 +5089,7 @@
         </p:nvSpPr>
         <p:spPr>
           <a:xfrm>
-            <a:off x="1008000" y="13695011"/>
+            <a:off x="1008000" y="14271011"/>
             <a:ext cx="12876000" cy="684000"/>
           </a:xfrm>
           <a:prstGeom prst="rect">
@@ -5140,7 +5140,7 @@
         </p:blipFill>
         <p:spPr>
           <a:xfrm>
-            <a:off x="792000" y="14595011"/>
+            <a:off x="792000" y="15315011"/>
             <a:ext cx="13308000" cy="3784753"/>
           </a:xfrm>
           <a:prstGeom prst="rect">
@@ -5156,7 +5156,7 @@
         </p:nvSpPr>
         <p:spPr>
           <a:xfrm>
-            <a:off x="792000" y="18451764"/>
+            <a:off x="792000" y="19171764"/>
             <a:ext cx="13308000" cy="453673"/>
           </a:xfrm>
           <a:prstGeom prst="rect">
@@ -5199,7 +5199,7 @@
         </p:nvSpPr>
         <p:spPr>
           <a:xfrm>
-            <a:off x="792000" y="19085436"/>
+            <a:off x="792000" y="20093436"/>
             <a:ext cx="13308000" cy="1724261"/>
           </a:xfrm>
           <a:prstGeom prst="rect">
@@ -5254,8 +5254,8 @@
           <p:nvPr/>
         </p:nvGraphicFramePr>
         <p:xfrm>
-          <a:off x="792000" y="21025697"/>
-          <a:ext cx="13308000" cy="2880000"/>
+          <a:off x="792000" y="22321697"/>
+          <a:ext cx="13308000" cy="3312000"/>
         </p:xfrm>
         <a:graphic>
           <a:graphicData uri="http://schemas.openxmlformats.org/drawingml/2006/table">
@@ -5267,7 +5267,7 @@
                 <a:gridCol w="7053240"/>
                 <a:gridCol w="6254760"/>
               </a:tblGrid>
-              <a:tr h="720000">
+              <a:tr h="828000">
                 <a:tc>
                   <a:txBody>
                     <a:bodyPr wrap="square"/>
@@ -5335,7 +5335,7 @@
                   </a:tcPr>
                 </a:tc>
               </a:tr>
-              <a:tr h="720000">
+              <a:tr h="828000">
                 <a:tc>
                   <a:txBody>
                     <a:bodyPr wrap="square"/>
@@ -5403,7 +5403,7 @@
                   </a:tcPr>
                 </a:tc>
               </a:tr>
-              <a:tr h="720000">
+              <a:tr h="828000">
                 <a:tc>
                   <a:txBody>
                     <a:bodyPr wrap="square"/>
@@ -5471,7 +5471,7 @@
                   </a:tcPr>
                 </a:tc>
               </a:tr>
-              <a:tr h="720000">
+              <a:tr h="828000">
                 <a:tc>
                   <a:txBody>
                     <a:bodyPr wrap="square"/>
@@ -5551,7 +5551,7 @@
         </p:nvSpPr>
         <p:spPr>
           <a:xfrm>
-            <a:off x="792000" y="24229697"/>
+            <a:off x="792000" y="26245697"/>
             <a:ext cx="13308000" cy="2645831"/>
           </a:xfrm>
           <a:prstGeom prst="rect">
@@ -5595,7 +5595,7 @@
               <a:t>ℒ = ℒ</a:t>
             </a:r>
             <a:r>
-              <a:rPr sz="2000" b="0" i="0" lang="ja-JP">
+              <a:rPr sz="3600" b="0" i="0" lang="ja-JP" baseline="-25000">
                 <a:solidFill>
                   <a:srgbClr val="000000"/>
                 </a:solidFill>
@@ -5617,7 +5617,7 @@
               <a:t> + 𝜆ℒ</a:t>
             </a:r>
             <a:r>
-              <a:rPr sz="2000" b="0" i="0" lang="ja-JP">
+              <a:rPr sz="3600" b="0" i="0" lang="ja-JP" baseline="-25000">
                 <a:solidFill>
                   <a:srgbClr val="000000"/>
                 </a:solidFill>
@@ -5684,7 +5684,7 @@
               <a:t>ℒ</a:t>
             </a:r>
             <a:r>
-              <a:rPr sz="2000" b="0" i="0" lang="ja-JP">
+              <a:rPr sz="3000" b="0" i="0" lang="ja-JP" baseline="-25000">
                 <a:solidFill>
                   <a:srgbClr val="000000"/>
                 </a:solidFill>
@@ -6034,9 +6034,9 @@
                           <a:solidFill>
                             <a:srgbClr val="FFFFFF"/>
                           </a:solidFill>
-                          <a:latin typeface="游ゴシック"/>
-                          <a:ea typeface="游ゴシック"/>
-                          <a:cs typeface="游ゴシック"/>
+                          <a:latin typeface="Cambria Math"/>
+                          <a:ea typeface="Cambria Math"/>
+                          <a:cs typeface="Cambria Math"/>
                         </a:rPr>
                         <a:t>𝜆</a:t>
                       </a:r>
@@ -6692,7 +6692,7 @@
                 <a:ea typeface="游ゴシック"/>
                 <a:cs typeface="游ゴシック"/>
               </a:rPr>
-              <a:t>署名を並べ替えると消え，質問文の語だけでは説明できない</a:t>
+              <a:t>署名を並べ替えると消え，質問文の語では説明できない</a:t>
             </a:r>
           </a:p>
         </p:txBody>
@@ -7198,7 +7198,7 @@
               <a:t>𝑒 = ‖𝑱</a:t>
             </a:r>
             <a:r>
-              <a:rPr sz="2000" b="0" i="0" lang="ja-JP">
+              <a:rPr sz="3000" b="0" i="0" lang="ja-JP" baseline="30000">
                 <a:solidFill>
                   <a:srgbClr val="000000"/>
                 </a:solidFill>
@@ -7582,7 +7582,7 @@
                 <a:ea typeface="游ゴシック"/>
                 <a:cs typeface="游ゴシック"/>
               </a:rPr>
-              <a:t>の動きを3群で比べた</a:t>
+              <a:t>の動き（コサイン距離）を3群で比べた</a:t>
             </a:r>
           </a:p>
         </p:txBody>
@@ -8014,7 +8014,7 @@
                 <a:ea typeface="游ゴシック"/>
                 <a:cs typeface="游ゴシック"/>
               </a:rPr>
-              <a:t>　加工の前後の距離 ÷ 同じ質問に別の画像を与えたときの距離（コサイン距離の平均）</a:t>
+              <a:t>　加工前後の距離の平均 ÷ 同じ質問に別の画像を与えたときの距離の平均</a:t>
             </a:r>
           </a:p>
         </p:txBody>
@@ -8395,7 +8395,28 @@
                 <a:ea typeface="游ゴシック"/>
                 <a:cs typeface="游ゴシック"/>
               </a:rPr>
-              <a:t>内部表現に表れた手続きの特徴は，回答の生成に十分用いられていないことが示唆される</a:t>
+              <a:t>内部表現に表れた手続きの特徴は，</a:t>
+            </a:r>
+            <a:br>
+              <a:rPr sz="3400" b="1" i="0" lang="ja-JP">
+                <a:solidFill>
+                  <a:srgbClr val="000000"/>
+                </a:solidFill>
+                <a:latin typeface="游ゴシック"/>
+                <a:ea typeface="游ゴシック"/>
+                <a:cs typeface="游ゴシック"/>
+              </a:rPr>
+            </a:br>
+            <a:r>
+              <a:rPr sz="3400" b="1" i="0" lang="ja-JP">
+                <a:solidFill>
+                  <a:srgbClr val="000000"/>
+                </a:solidFill>
+                <a:latin typeface="游ゴシック"/>
+                <a:ea typeface="游ゴシック"/>
+                <a:cs typeface="游ゴシック"/>
+              </a:rPr>
+              <a:t>回答の生成に十分用いられていないことが示唆される</a:t>
             </a:r>
           </a:p>
         </p:txBody>
@@ -8529,7 +8550,7 @@
                 <a:ea typeface="游ゴシック"/>
                 <a:cs typeface="游ゴシック"/>
               </a:rPr>
-              <a:t>での結果．相対感度は一次近似</a:t>
+              <a:t>．相対感度は一次近似</a:t>
             </a:r>
           </a:p>
         </p:txBody>

--- a/presentations/20261116_PCSJ-IMPS2026_ポスター初案.pptx
+++ b/presentations/20261116_PCSJ-IMPS2026_ポスター初案.pptx
@@ -8089,7 +8089,7 @@
         <p:spPr>
           <a:xfrm>
             <a:off x="28704000" y="16019869"/>
-            <a:ext cx="13308000" cy="2244231"/>
+            <a:ext cx="13308000" cy="3108231"/>
           </a:xfrm>
           <a:prstGeom prst="rect">
             <a:avLst/>
@@ -8213,6 +8213,40 @@
               <a:buChar char="•"/>
             </a:pPr>
             <a:r>
+              <a:rPr sz="2700" b="1" i="0" lang="ja-JP">
+                <a:solidFill>
+                  <a:srgbClr val="000000"/>
+                </a:solidFill>
+                <a:latin typeface="游ゴシック"/>
+                <a:ea typeface="游ゴシック"/>
+                <a:cs typeface="游ゴシック"/>
+              </a:rPr>
+              <a:t>距離そのものでは逆向き　</a:t>
+            </a:r>
+            <a:r>
+              <a:rPr sz="2700" b="0" i="0" lang="ja-JP">
+                <a:solidFill>
+                  <a:srgbClr val="000000"/>
+                </a:solidFill>
+                <a:latin typeface="游ゴシック"/>
+                <a:ea typeface="游ゴシック"/>
+                <a:cs typeface="游ゴシック"/>
+              </a:rPr>
+              <a:t>proposal のほうがよく動き（区間は0を含まない），対照の距離も約5倍</a:t>
+            </a:r>
+          </a:p>
+          <a:p>
+            <a:pPr marL="342900" indent="-342900">
+              <a:lnSpc>
+                <a:spcPts val="3294"/>
+              </a:lnSpc>
+              <a:spcAft>
+                <a:spcPts val="300"/>
+              </a:spcAft>
+              <a:buFont typeface="Arial"/>
+              <a:buChar char="•"/>
+            </a:pPr>
+            <a:r>
               <a:rPr sz="2700" b="0" i="0" lang="ja-JP">
                 <a:solidFill>
                   <a:srgbClr val="000000"/>
@@ -8234,7 +8268,7 @@
         </p:nvSpPr>
         <p:spPr>
           <a:xfrm>
-            <a:off x="28704000" y="18480101"/>
+            <a:off x="28704000" y="19344101"/>
             <a:ext cx="13308000" cy="684000"/>
           </a:xfrm>
           <a:prstGeom prst="rect">
@@ -8276,7 +8310,7 @@
         </p:nvSpPr>
         <p:spPr>
           <a:xfrm>
-            <a:off x="28920000" y="18480101"/>
+            <a:off x="28920000" y="19344101"/>
             <a:ext cx="12876000" cy="684000"/>
           </a:xfrm>
           <a:prstGeom prst="rect">
@@ -8319,7 +8353,7 @@
         </p:nvSpPr>
         <p:spPr>
           <a:xfrm>
-            <a:off x="28704000" y="19380101"/>
+            <a:off x="28704000" y="20244101"/>
             <a:ext cx="13308000" cy="1485658"/>
           </a:xfrm>
           <a:prstGeom prst="roundRect">
@@ -8365,7 +8399,7 @@
         </p:nvSpPr>
         <p:spPr>
           <a:xfrm>
-            <a:off x="28920000" y="19596101"/>
+            <a:off x="28920000" y="20460101"/>
             <a:ext cx="12876000" cy="1053658"/>
           </a:xfrm>
           <a:prstGeom prst="rect">
@@ -8429,7 +8463,7 @@
         </p:nvSpPr>
         <p:spPr>
           <a:xfrm>
-            <a:off x="28704000" y="21117759"/>
+            <a:off x="28704000" y="21981759"/>
             <a:ext cx="13308000" cy="2206129"/>
           </a:xfrm>
           <a:prstGeom prst="rect">
@@ -8563,7 +8597,7 @@
         </p:nvSpPr>
         <p:spPr>
           <a:xfrm>
-            <a:off x="28704000" y="23539888"/>
+            <a:off x="28704000" y="24403888"/>
             <a:ext cx="13308000" cy="2574625"/>
           </a:xfrm>
           <a:prstGeom prst="roundRect">
@@ -8609,7 +8643,7 @@
         </p:nvSpPr>
         <p:spPr>
           <a:xfrm>
-            <a:off x="28920000" y="23755888"/>
+            <a:off x="28920000" y="24619888"/>
             <a:ext cx="12876000" cy="2142625"/>
           </a:xfrm>
           <a:prstGeom prst="rect">

--- a/presentations/20261116_PCSJ-IMPS2026_ポスター初案.pptx
+++ b/presentations/20261116_PCSJ-IMPS2026_ポスター初案.pptx
@@ -270,6 +270,22 @@
             </a:ln>
           </c:spPr>
         </c:majorGridlines>
+        <c:title>
+          <c:tx>
+            <c:rich>
+              <a:bodyPr/>
+              <a:lstStyle/>
+              <a:p>
+                <a:r>
+                  <a:rPr sz="2000" lang="ja-JP"/>
+                  <a:t>読み取り精度（%）</a:t>
+                </a:r>
+              </a:p>
+            </c:rich>
+          </c:tx>
+          <c:layout/>
+          <c:overlay val="0"/>
+        </c:title>
         <c:majorTickMark val="out"/>
         <c:minorTickMark val="none"/>
         <c:tickLblPos val="nextTo"/>
@@ -4901,7 +4917,7 @@
                 <a:ea typeface="游ゴシック"/>
                 <a:cs typeface="游ゴシック"/>
               </a:rPr>
-              <a:t>Waniら[1]　</a:t>
+              <a:t>Wani ら[1]　</a:t>
             </a:r>
             <a:r>
               <a:rPr sz="3600" b="0" i="0" lang="ja-JP">
@@ -5186,7 +5202,7 @@
                 <a:ea typeface="游ゴシック"/>
                 <a:cs typeface="游ゴシック"/>
               </a:rPr>
-              <a:t>図1　提案手法の概要（予稿の図1）</a:t>
+              <a:t>図1　提案手法の概要</a:t>
             </a:r>
           </a:p>
         </p:txBody>
@@ -5240,7 +5256,7 @@
                 <a:ea typeface="游ゴシック"/>
                 <a:cs typeface="游ゴシック"/>
               </a:rPr>
-              <a:t>GQA[3]の各質問に付く回答の手順（functional program）から，操作の名前だけを実行順に並べた列．署名が一致すれば「手続きが同じ」とみなす．</a:t>
+              <a:t>GQA[2]の各質問に付く回答の手順（functional program）から，操作の名前だけを実行順に並べた列．署名が一致すれば「手続きが同じ」とみなす．</a:t>
             </a:r>
           </a:p>
         </p:txBody>
@@ -5703,7 +5719,7 @@
                 <a:ea typeface="游ゴシック"/>
                 <a:cs typeface="游ゴシック"/>
               </a:rPr>
-              <a:t>は，署名をクラスとする supervised contrastive loss[4]．射影を挟まず，第16層・入力末尾の内部表現</a:t>
+              <a:t>は，署名をクラスとする supervised contrastive loss[3]．射影を挟まず，第16層・入力末尾の内部表現</a:t>
             </a:r>
             <a:r>
               <a:rPr sz="3000" b="0" i="0" lang="ja-JP">
@@ -5887,7 +5903,7 @@
                 <a:ea typeface="游ゴシック"/>
                 <a:cs typeface="游ゴシック"/>
               </a:rPr>
-              <a:t>SmolVLM-500M-Instruct[2]</a:t>
+              <a:t>SmolVLM-500M-Instruct[4]</a:t>
             </a:r>
           </a:p>
           <a:p>
@@ -6427,7 +6443,28 @@
                 <a:ea typeface="游ゴシック"/>
                 <a:cs typeface="游ゴシック"/>
               </a:rPr>
-              <a:t>3群 × 3乱数種 ＝ 9回学習し，3乱数種の平均を示す．ablation は「意味のあるラベル」が要るかを確かめる対照</a:t>
+              <a:t>3群 × 3乱数種 = 9回学習し，平均を示す．</a:t>
+            </a:r>
+            <a:br>
+              <a:rPr sz="2700" b="0" i="0" lang="ja-JP">
+                <a:solidFill>
+                  <a:srgbClr val="404040"/>
+                </a:solidFill>
+                <a:latin typeface="游ゴシック"/>
+                <a:ea typeface="游ゴシック"/>
+                <a:cs typeface="游ゴシック"/>
+              </a:rPr>
+            </a:br>
+            <a:r>
+              <a:rPr sz="2700" b="0" i="0" lang="ja-JP">
+                <a:solidFill>
+                  <a:srgbClr val="404040"/>
+                </a:solidFill>
+                <a:latin typeface="游ゴシック"/>
+                <a:ea typeface="游ゴシック"/>
+                <a:cs typeface="游ゴシック"/>
+              </a:rPr>
+              <a:t>ablation は「意味のあるラベル」が要るかを確かめる対照</a:t>
             </a:r>
           </a:p>
         </p:txBody>
@@ -6735,7 +6772,7 @@
                 <a:ea typeface="游ゴシック"/>
                 <a:cs typeface="游ゴシック"/>
               </a:rPr>
-              <a:t>4.2　正解率（GQA公式の評価）</a:t>
+              <a:t>4.2　正解率（GQA 公式の評価）</a:t>
             </a:r>
           </a:p>
         </p:txBody>
@@ -7075,7 +7112,28 @@
                 <a:ea typeface="游ゴシック"/>
                 <a:cs typeface="游ゴシック"/>
               </a:rPr>
-              <a:t>proposal − baseline は -0.06pt，95%信頼区間 [-1.81, +1.70]．0を含み，低下は最大でも1.81pt</a:t>
+              <a:t>proposal − baseline は −0.06pt，95%信頼区間 [−1.81, +1.70]．</a:t>
+            </a:r>
+            <a:br>
+              <a:rPr sz="2700" b="0" i="0" lang="ja-JP">
+                <a:solidFill>
+                  <a:srgbClr val="000000"/>
+                </a:solidFill>
+                <a:latin typeface="游ゴシック"/>
+                <a:ea typeface="游ゴシック"/>
+                <a:cs typeface="游ゴシック"/>
+              </a:rPr>
+            </a:br>
+            <a:r>
+              <a:rPr sz="2700" b="0" i="0" lang="ja-JP">
+                <a:solidFill>
+                  <a:srgbClr val="000000"/>
+                </a:solidFill>
+                <a:latin typeface="游ゴシック"/>
+                <a:ea typeface="游ゴシック"/>
+                <a:cs typeface="游ゴシック"/>
+              </a:rPr>
+              <a:t>0を含み，低下は最大でも1.81pt</a:t>
             </a:r>
           </a:p>
           <a:p>
@@ -7098,7 +7156,7 @@
                 <a:ea typeface="游ゴシック"/>
                 <a:cs typeface="游ゴシック"/>
               </a:rPr>
-              <a:t>誤答した問でも，proposal では署名を96.4%読み取れる．誤りは署名の取り違えではない</a:t>
+              <a:t>誤答した問でも，署名の読み取り精度は高い（proposal 96.4%）</a:t>
             </a:r>
           </a:p>
         </p:txBody>
@@ -7560,7 +7618,7 @@
                 <a:ea typeface="游ゴシック"/>
                 <a:cs typeface="游ゴシック"/>
               </a:rPr>
-              <a:t>予稿以降に測定．Waniら[1]の加工8族23通りを評価データの全問に施し，第16層の</a:t>
+              <a:t>予稿以降に測定．Wani ら[1]の加工8族23通りを全問に施し，第16層の</a:t>
             </a:r>
             <a:r>
               <a:rPr sz="2700" b="0" i="0" lang="ja-JP">
@@ -8164,7 +8222,7 @@
                 <a:ea typeface="游ゴシック"/>
                 <a:cs typeface="游ゴシック"/>
               </a:rPr>
-              <a:t>-9.9pt [-13.8, -6.1]</a:t>
+              <a:t>−9.9pt [−13.8, −6.1]</a:t>
             </a:r>
           </a:p>
           <a:p>
@@ -8198,7 +8256,28 @@
                 <a:ea typeface="游ゴシック"/>
                 <a:cs typeface="游ゴシック"/>
               </a:rPr>
-              <a:t>-5.7pt [-13.0, +1.7]．3乱数種すべて負だが，区間が0を含む</a:t>
+              <a:t>−5.7pt [−13.0, +1.7]．</a:t>
+            </a:r>
+            <a:br>
+              <a:rPr sz="2700" b="0" i="0" lang="ja-JP">
+                <a:solidFill>
+                  <a:srgbClr val="000000"/>
+                </a:solidFill>
+                <a:latin typeface="游ゴシック"/>
+                <a:ea typeface="游ゴシック"/>
+                <a:cs typeface="游ゴシック"/>
+              </a:rPr>
+            </a:br>
+            <a:r>
+              <a:rPr sz="2700" b="0" i="0" lang="ja-JP">
+                <a:solidFill>
+                  <a:srgbClr val="000000"/>
+                </a:solidFill>
+                <a:latin typeface="游ゴシック"/>
+                <a:ea typeface="游ゴシック"/>
+                <a:cs typeface="游ゴシック"/>
+              </a:rPr>
+              <a:t>3乱数種とも負，区間は0を含む</a:t>
             </a:r>
           </a:p>
           <a:p>
@@ -8494,7 +8573,7 @@
                 <a:ea typeface="游ゴシック"/>
                 <a:cs typeface="游ゴシック"/>
               </a:rPr>
-              <a:t>正解率を高めるには，手続きの特徴を回答の生成に用いる工夫が要る</a:t>
+              <a:t>正解率を高めるには，手続きの特徴を回答の生成に用いる工夫が要ると考えられる</a:t>
             </a:r>
           </a:p>
           <a:p>
@@ -8684,7 +8763,7 @@
                 <a:ea typeface="游ゴシック"/>
                 <a:cs typeface="游ゴシック"/>
               </a:rPr>
-              <a:t>Elazarら[5]は既にある性質を表現から除き，語予測への影響を見た．本研究は逆に，手続きの特徴を損失で内部表現に作り込み，回答の生成に使われるかを見た．</a:t>
+              <a:t>Elazar ら[5]は既にある性質を表現から除き，語予測への影響を見た．本研究は逆に，手続きの特徴を損失で内部表現に作り込み，回答の生成に使われるかを見た．</a:t>
             </a:r>
           </a:p>
           <a:p>
@@ -8749,7 +8828,29 @@
                 <a:ea typeface="游ゴシック"/>
                 <a:cs typeface="游ゴシック"/>
               </a:rPr>
-              <a:t>[1] F. A. Wani et al., “Same Answer, Different Representations: Hidden Instability in VLMs,” arXiv:2602.06652, 2026.</a:t>
+              <a:t>[1] F. A. Wani </a:t>
+            </a:r>
+            <a:r>
+              <a:rPr i="1" sz="1500" b="0" lang="ja-JP">
+                <a:solidFill>
+                  <a:srgbClr val="404040"/>
+                </a:solidFill>
+                <a:latin typeface="游ゴシック"/>
+                <a:ea typeface="游ゴシック"/>
+                <a:cs typeface="游ゴシック"/>
+              </a:rPr>
+              <a:t>et al.</a:t>
+            </a:r>
+            <a:r>
+              <a:rPr sz="1500" b="0" i="0" lang="ja-JP">
+                <a:solidFill>
+                  <a:srgbClr val="404040"/>
+                </a:solidFill>
+                <a:latin typeface="游ゴシック"/>
+                <a:ea typeface="游ゴシック"/>
+                <a:cs typeface="游ゴシック"/>
+              </a:rPr>
+              <a:t>, “Same Answer, Different Representations: Hidden Instability in VLMs,” arXiv:2602.06652, 2026.</a:t>
             </a:r>
           </a:p>
           <a:p>
@@ -8771,7 +8872,29 @@
                 <a:ea typeface="游ゴシック"/>
                 <a:cs typeface="游ゴシック"/>
               </a:rPr>
-              <a:t>[2] A. Marafioti et al., “SmolVLM: Redefining Small and Efficient Multimodal Models,” arXiv:2504.05299, 2025.</a:t>
+              <a:t>[2] D. A. Hudson and C. D. Manning, “GQA: A New Dataset for Real-World Visual Reasoning and Compositional Question Answering,” in Proc. </a:t>
+            </a:r>
+            <a:r>
+              <a:rPr i="1" sz="1500" b="0" lang="ja-JP">
+                <a:solidFill>
+                  <a:srgbClr val="404040"/>
+                </a:solidFill>
+                <a:latin typeface="游ゴシック"/>
+                <a:ea typeface="游ゴシック"/>
+                <a:cs typeface="游ゴシック"/>
+              </a:rPr>
+              <a:t>IEEE/CVF CVPR</a:t>
+            </a:r>
+            <a:r>
+              <a:rPr sz="1500" b="0" i="0" lang="ja-JP">
+                <a:solidFill>
+                  <a:srgbClr val="404040"/>
+                </a:solidFill>
+                <a:latin typeface="游ゴシック"/>
+                <a:ea typeface="游ゴシック"/>
+                <a:cs typeface="游ゴシック"/>
+              </a:rPr>
+              <a:t>, 2019.</a:t>
             </a:r>
           </a:p>
           <a:p>
@@ -8793,7 +8916,51 @@
                 <a:ea typeface="游ゴシック"/>
                 <a:cs typeface="游ゴシック"/>
               </a:rPr>
-              <a:t>[3] D. A. Hudson and C. D. Manning, “GQA: A New Dataset for Real-World Visual Reasoning and Compositional Question Answering,” in Proc. IEEE/CVF CVPR, 2019.</a:t>
+              <a:t>[3] P. Khosla </a:t>
+            </a:r>
+            <a:r>
+              <a:rPr i="1" sz="1500" b="0" lang="ja-JP">
+                <a:solidFill>
+                  <a:srgbClr val="404040"/>
+                </a:solidFill>
+                <a:latin typeface="游ゴシック"/>
+                <a:ea typeface="游ゴシック"/>
+                <a:cs typeface="游ゴシック"/>
+              </a:rPr>
+              <a:t>et al.</a:t>
+            </a:r>
+            <a:r>
+              <a:rPr sz="1500" b="0" i="0" lang="ja-JP">
+                <a:solidFill>
+                  <a:srgbClr val="404040"/>
+                </a:solidFill>
+                <a:latin typeface="游ゴシック"/>
+                <a:ea typeface="游ゴシック"/>
+                <a:cs typeface="游ゴシック"/>
+              </a:rPr>
+              <a:t>, “Supervised Contrastive Learning,” in Proc. </a:t>
+            </a:r>
+            <a:r>
+              <a:rPr i="1" sz="1500" b="0" lang="ja-JP">
+                <a:solidFill>
+                  <a:srgbClr val="404040"/>
+                </a:solidFill>
+                <a:latin typeface="游ゴシック"/>
+                <a:ea typeface="游ゴシック"/>
+                <a:cs typeface="游ゴシック"/>
+              </a:rPr>
+              <a:t>NeurIPS</a:t>
+            </a:r>
+            <a:r>
+              <a:rPr sz="1500" b="0" i="0" lang="ja-JP">
+                <a:solidFill>
+                  <a:srgbClr val="404040"/>
+                </a:solidFill>
+                <a:latin typeface="游ゴシック"/>
+                <a:ea typeface="游ゴシック"/>
+                <a:cs typeface="游ゴシック"/>
+              </a:rPr>
+              <a:t>, 2020.</a:t>
             </a:r>
           </a:p>
           <a:p>
@@ -8815,7 +8982,29 @@
                 <a:ea typeface="游ゴシック"/>
                 <a:cs typeface="游ゴシック"/>
               </a:rPr>
-              <a:t>[4] P. Khosla et al., “Supervised Contrastive Learning,” in Proc. NeurIPS, 2020.</a:t>
+              <a:t>[4] A. Marafioti </a:t>
+            </a:r>
+            <a:r>
+              <a:rPr i="1" sz="1500" b="0" lang="ja-JP">
+                <a:solidFill>
+                  <a:srgbClr val="404040"/>
+                </a:solidFill>
+                <a:latin typeface="游ゴシック"/>
+                <a:ea typeface="游ゴシック"/>
+                <a:cs typeface="游ゴシック"/>
+              </a:rPr>
+              <a:t>et al.</a:t>
+            </a:r>
+            <a:r>
+              <a:rPr sz="1500" b="0" i="0" lang="ja-JP">
+                <a:solidFill>
+                  <a:srgbClr val="404040"/>
+                </a:solidFill>
+                <a:latin typeface="游ゴシック"/>
+                <a:ea typeface="游ゴシック"/>
+                <a:cs typeface="游ゴシック"/>
+              </a:rPr>
+              <a:t>, “SmolVLM: Redefining Small and Efficient Multimodal Models,” arXiv:2504.05299, 2025.</a:t>
             </a:r>
           </a:p>
           <a:p>
@@ -8837,7 +9026,51 @@
                 <a:ea typeface="游ゴシック"/>
                 <a:cs typeface="游ゴシック"/>
               </a:rPr>
-              <a:t>[5] Y. Elazar et al., “Amnesic Probing: Behavioral Explanation with Amnesic Counterfactuals,” TACL, 2021.</a:t>
+              <a:t>[5] Y. Elazar </a:t>
+            </a:r>
+            <a:r>
+              <a:rPr i="1" sz="1500" b="0" lang="ja-JP">
+                <a:solidFill>
+                  <a:srgbClr val="404040"/>
+                </a:solidFill>
+                <a:latin typeface="游ゴシック"/>
+                <a:ea typeface="游ゴシック"/>
+                <a:cs typeface="游ゴシック"/>
+              </a:rPr>
+              <a:t>et al.</a:t>
+            </a:r>
+            <a:r>
+              <a:rPr sz="1500" b="0" i="0" lang="ja-JP">
+                <a:solidFill>
+                  <a:srgbClr val="404040"/>
+                </a:solidFill>
+                <a:latin typeface="游ゴシック"/>
+                <a:ea typeface="游ゴシック"/>
+                <a:cs typeface="游ゴシック"/>
+              </a:rPr>
+              <a:t>, “Amnesic Probing: Behavioral Explanation with Amnesic Counterfactuals,” </a:t>
+            </a:r>
+            <a:r>
+              <a:rPr i="1" sz="1500" b="0" lang="ja-JP">
+                <a:solidFill>
+                  <a:srgbClr val="404040"/>
+                </a:solidFill>
+                <a:latin typeface="游ゴシック"/>
+                <a:ea typeface="游ゴシック"/>
+                <a:cs typeface="游ゴシック"/>
+              </a:rPr>
+              <a:t>TACL</a:t>
+            </a:r>
+            <a:r>
+              <a:rPr sz="1500" b="0" i="0" lang="ja-JP">
+                <a:solidFill>
+                  <a:srgbClr val="404040"/>
+                </a:solidFill>
+                <a:latin typeface="游ゴシック"/>
+                <a:ea typeface="游ゴシック"/>
+                <a:cs typeface="游ゴシック"/>
+              </a:rPr>
+              <a:t>, 2021.</a:t>
             </a:r>
           </a:p>
         </p:txBody>

--- a/presentations/20261116_PCSJ-IMPS2026_ポスター初案.pptx
+++ b/presentations/20261116_PCSJ-IMPS2026_ポスター初案.pptx
@@ -693,7 +693,7 @@
                   <c:v>縮小</c:v>
                 </c:pt>
                 <c:pt idx="3">
-                  <c:v>縮小＋余白</c:v>
+                  <c:v>縮小と余白</c:v>
                 </c:pt>
                 <c:pt idx="4">
                   <c:v>回転</c:v>
@@ -785,7 +785,7 @@
                   <c:v>縮小</c:v>
                 </c:pt>
                 <c:pt idx="3">
-                  <c:v>縮小＋余白</c:v>
+                  <c:v>縮小と余白</c:v>
                 </c:pt>
                 <c:pt idx="4">
                   <c:v>回転</c:v>
@@ -877,7 +877,7 @@
                   <c:v>縮小</c:v>
                 </c:pt>
                 <c:pt idx="3">
-                  <c:v>縮小＋余白</c:v>
+                  <c:v>縮小と余白</c:v>
                 </c:pt>
                 <c:pt idx="4">
                   <c:v>回転</c:v>
@@ -8188,7 +8188,7 @@
                 <a:ea typeface="游ゴシック"/>
                 <a:cs typeface="游ゴシック"/>
               </a:rPr>
-              <a:t>baseline 15.6% ／ proposal 10.0% ／ ablation 19.9%</a:t>
+              <a:t>baseline 15.65% ／ proposal 9.99% ／ ablation 19.93%</a:t>
             </a:r>
           </a:p>
           <a:p>
@@ -8222,7 +8222,7 @@
                 <a:ea typeface="游ゴシック"/>
                 <a:cs typeface="游ゴシック"/>
               </a:rPr>
-              <a:t>−9.9pt [−13.8, −6.1]</a:t>
+              <a:t>−9.95pt [−13.82, −6.07]</a:t>
             </a:r>
           </a:p>
           <a:p>
@@ -8256,7 +8256,7 @@
                 <a:ea typeface="游ゴシック"/>
                 <a:cs typeface="游ゴシック"/>
               </a:rPr>
-              <a:t>−5.7pt [−13.0, +1.7]．</a:t>
+              <a:t>−5.66pt [−13.01, +1.69]．</a:t>
             </a:r>
             <a:br>
               <a:rPr sz="2700" b="0" i="0" lang="ja-JP">

--- a/presentations/20261116_PCSJ-IMPS2026_ポスター初案.pptx
+++ b/presentations/20261116_PCSJ-IMPS2026_ポスター初案.pptx
@@ -705,7 +705,7 @@
                   <c:v>文字列</c:v>
                 </c:pt>
                 <c:pt idx="7">
-                  <c:v>白い箱</c:v>
+                  <c:v>文字なし</c:v>
                 </c:pt>
                 <c:pt idx="8">
                   <c:v>23通り</c:v>
@@ -797,7 +797,7 @@
                   <c:v>文字列</c:v>
                 </c:pt>
                 <c:pt idx="7">
-                  <c:v>白い箱</c:v>
+                  <c:v>文字なし</c:v>
                 </c:pt>
                 <c:pt idx="8">
                   <c:v>23通り</c:v>
@@ -889,7 +889,7 @@
                   <c:v>文字列</c:v>
                 </c:pt>
                 <c:pt idx="7">
-                  <c:v>白い箱</c:v>
+                  <c:v>文字なし</c:v>
                 </c:pt>
                 <c:pt idx="8">
                   <c:v>23通り</c:v>
@@ -7618,7 +7618,7 @@
                 <a:ea typeface="游ゴシック"/>
                 <a:cs typeface="游ゴシック"/>
               </a:rPr>
-              <a:t>予稿以降に測定．Wani ら[1]の加工8族23通りを全問に施し，第16層の</a:t>
+              <a:t>予稿以降に測定．Wani ら[1]の加工8族23通りを全問に施し，元の画像の第16層の</a:t>
             </a:r>
             <a:r>
               <a:rPr sz="2700" b="0" i="0" lang="ja-JP">
@@ -7640,7 +7640,7 @@
                 <a:ea typeface="游ゴシック"/>
                 <a:cs typeface="游ゴシック"/>
               </a:rPr>
-              <a:t>の動き（コサイン距離）を3群で比べた</a:t>
+              <a:t>と，加工した画像の𝒉′のコサイン距離を，同じ質問ごとに測って3群で比べた</a:t>
             </a:r>
           </a:p>
         </p:txBody>
@@ -7908,7 +7908,7 @@
                 <a:ea typeface="游ゴシック"/>
                 <a:cs typeface="游ゴシック"/>
               </a:rPr>
-              <a:t>文字の重ね書き</a:t>
+              <a:t>指示文の重ね書き</a:t>
             </a:r>
           </a:p>
         </p:txBody>
@@ -8072,7 +8072,7 @@
                 <a:ea typeface="游ゴシック"/>
                 <a:cs typeface="游ゴシック"/>
               </a:rPr>
-              <a:t>　加工前後の距離の平均 ÷ 同じ質問に別の画像を与えたときの距離の平均</a:t>
+              <a:t>　（元の画像と加工した画像の距離）の平均 ÷ （元の画像と別の画像の距離）の平均．質問は同じ</a:t>
             </a:r>
           </a:p>
         </p:txBody>
@@ -8133,7 +8133,7 @@
                 <a:ea typeface="游ゴシック"/>
                 <a:cs typeface="游ゴシック"/>
               </a:rPr>
-              <a:t>族ごとの比較は探索的（8族を3乱数種で比べている）．判定は「23通り」で行う</a:t>
+              <a:t>重ね書き3種（指示文・文字列・文字なし）は同じ白い箱で，中身だけ違う．判定は「23通り」で行う</a:t>
             </a:r>
           </a:p>
         </p:txBody>
@@ -8211,7 +8211,7 @@
                 <a:ea typeface="游ゴシック"/>
                 <a:cs typeface="游ゴシック"/>
               </a:rPr>
-              <a:t>ablation より小さい　</a:t>
+              <a:t>proposal は ablation より小さい　</a:t>
             </a:r>
             <a:r>
               <a:rPr sz="2700" b="0" i="0" lang="ja-JP">
@@ -8245,7 +8245,7 @@
                 <a:ea typeface="游ゴシック"/>
                 <a:cs typeface="游ゴシック"/>
               </a:rPr>
-              <a:t>baseline との差は向きが未決　</a:t>
+              <a:t>proposal と baseline の差は向きが未決　</a:t>
             </a:r>
             <a:r>
               <a:rPr sz="2700" b="0" i="0" lang="ja-JP">
@@ -8334,7 +8334,7 @@
                 <a:ea typeface="游ゴシック"/>
                 <a:cs typeface="游ゴシック"/>
               </a:rPr>
-              <a:t>最終層と回答では，幾何的な加工について3群の差は見られない</a:t>
+              <a:t>第32層の比と回答の変化では，幾何的な加工について3群の差は見られない</a:t>
             </a:r>
           </a:p>
         </p:txBody>
@@ -8607,7 +8607,7 @@
                 <a:ea typeface="游ゴシック"/>
                 <a:cs typeface="游ゴシック"/>
               </a:rPr>
-              <a:t>乱数種を足して安定性の向きを決める．回答の型で整合する群を足し，効果が署名に固有かを確かめる</a:t>
+              <a:t>乱数種を足して，第16層の比と距離の向きを決める．回答の型で整合する群を足し，効果が署名に固有かを確かめる</a:t>
             </a:r>
           </a:p>
           <a:p>
